--- a/재정학/01_Lectures/재정학 원본 그래프.pptx
+++ b/재정학/01_Lectures/재정학 원본 그래프.pptx
@@ -8,6 +8,7 @@
     <p:sldId id="257" r:id="rId2"/>
     <p:sldId id="258" r:id="rId3"/>
     <p:sldId id="259" r:id="rId4"/>
+    <p:sldId id="260" r:id="rId5"/>
   </p:sldIdLst>
   <p:sldSz cx="12192000" cy="6858000"/>
   <p:notesSz cx="6858000" cy="9144000"/>
@@ -272,7 +273,7 @@
           <a:p>
             <a:fld id="{A045B708-0C1F-467E-8BD3-0C4EB3C5FB22}" type="datetimeFigureOut">
               <a:rPr lang="ko-KR" altLang="en-US" smtClean="0"/>
-              <a:t>2026-01-06</a:t>
+              <a:t>2026-01-12</a:t>
             </a:fld>
             <a:endParaRPr lang="ko-KR" altLang="en-US"/>
           </a:p>
@@ -470,7 +471,7 @@
           <a:p>
             <a:fld id="{A045B708-0C1F-467E-8BD3-0C4EB3C5FB22}" type="datetimeFigureOut">
               <a:rPr lang="ko-KR" altLang="en-US" smtClean="0"/>
-              <a:t>2026-01-06</a:t>
+              <a:t>2026-01-12</a:t>
             </a:fld>
             <a:endParaRPr lang="ko-KR" altLang="en-US"/>
           </a:p>
@@ -678,7 +679,7 @@
           <a:p>
             <a:fld id="{A045B708-0C1F-467E-8BD3-0C4EB3C5FB22}" type="datetimeFigureOut">
               <a:rPr lang="ko-KR" altLang="en-US" smtClean="0"/>
-              <a:t>2026-01-06</a:t>
+              <a:t>2026-01-12</a:t>
             </a:fld>
             <a:endParaRPr lang="ko-KR" altLang="en-US"/>
           </a:p>
@@ -876,7 +877,7 @@
           <a:p>
             <a:fld id="{A045B708-0C1F-467E-8BD3-0C4EB3C5FB22}" type="datetimeFigureOut">
               <a:rPr lang="ko-KR" altLang="en-US" smtClean="0"/>
-              <a:t>2026-01-06</a:t>
+              <a:t>2026-01-12</a:t>
             </a:fld>
             <a:endParaRPr lang="ko-KR" altLang="en-US"/>
           </a:p>
@@ -1151,7 +1152,7 @@
           <a:p>
             <a:fld id="{A045B708-0C1F-467E-8BD3-0C4EB3C5FB22}" type="datetimeFigureOut">
               <a:rPr lang="ko-KR" altLang="en-US" smtClean="0"/>
-              <a:t>2026-01-06</a:t>
+              <a:t>2026-01-12</a:t>
             </a:fld>
             <a:endParaRPr lang="ko-KR" altLang="en-US"/>
           </a:p>
@@ -1416,7 +1417,7 @@
           <a:p>
             <a:fld id="{A045B708-0C1F-467E-8BD3-0C4EB3C5FB22}" type="datetimeFigureOut">
               <a:rPr lang="ko-KR" altLang="en-US" smtClean="0"/>
-              <a:t>2026-01-06</a:t>
+              <a:t>2026-01-12</a:t>
             </a:fld>
             <a:endParaRPr lang="ko-KR" altLang="en-US"/>
           </a:p>
@@ -1828,7 +1829,7 @@
           <a:p>
             <a:fld id="{A045B708-0C1F-467E-8BD3-0C4EB3C5FB22}" type="datetimeFigureOut">
               <a:rPr lang="ko-KR" altLang="en-US" smtClean="0"/>
-              <a:t>2026-01-06</a:t>
+              <a:t>2026-01-12</a:t>
             </a:fld>
             <a:endParaRPr lang="ko-KR" altLang="en-US"/>
           </a:p>
@@ -1969,7 +1970,7 @@
           <a:p>
             <a:fld id="{A045B708-0C1F-467E-8BD3-0C4EB3C5FB22}" type="datetimeFigureOut">
               <a:rPr lang="ko-KR" altLang="en-US" smtClean="0"/>
-              <a:t>2026-01-06</a:t>
+              <a:t>2026-01-12</a:t>
             </a:fld>
             <a:endParaRPr lang="ko-KR" altLang="en-US"/>
           </a:p>
@@ -2082,7 +2083,7 @@
           <a:p>
             <a:fld id="{A045B708-0C1F-467E-8BD3-0C4EB3C5FB22}" type="datetimeFigureOut">
               <a:rPr lang="ko-KR" altLang="en-US" smtClean="0"/>
-              <a:t>2026-01-06</a:t>
+              <a:t>2026-01-12</a:t>
             </a:fld>
             <a:endParaRPr lang="ko-KR" altLang="en-US"/>
           </a:p>
@@ -2393,7 +2394,7 @@
           <a:p>
             <a:fld id="{A045B708-0C1F-467E-8BD3-0C4EB3C5FB22}" type="datetimeFigureOut">
               <a:rPr lang="ko-KR" altLang="en-US" smtClean="0"/>
-              <a:t>2026-01-06</a:t>
+              <a:t>2026-01-12</a:t>
             </a:fld>
             <a:endParaRPr lang="ko-KR" altLang="en-US"/>
           </a:p>
@@ -2681,7 +2682,7 @@
           <a:p>
             <a:fld id="{A045B708-0C1F-467E-8BD3-0C4EB3C5FB22}" type="datetimeFigureOut">
               <a:rPr lang="ko-KR" altLang="en-US" smtClean="0"/>
-              <a:t>2026-01-06</a:t>
+              <a:t>2026-01-12</a:t>
             </a:fld>
             <a:endParaRPr lang="ko-KR" altLang="en-US"/>
           </a:p>
@@ -2922,7 +2923,7 @@
           <a:p>
             <a:fld id="{A045B708-0C1F-467E-8BD3-0C4EB3C5FB22}" type="datetimeFigureOut">
               <a:rPr lang="ko-KR" altLang="en-US" smtClean="0"/>
-              <a:t>2026-01-06</a:t>
+              <a:t>2026-01-12</a:t>
             </a:fld>
             <a:endParaRPr lang="ko-KR" altLang="en-US"/>
           </a:p>
@@ -3688,6 +3689,60 @@
           <a:chExt cx="0" cy="0"/>
         </a:xfrm>
       </p:grpSpPr>
+      <p:sp>
+        <p:nvSpPr>
+          <p:cNvPr id="53" name="직사각형 52">
+            <a:extLst>
+              <a:ext uri="{FF2B5EF4-FFF2-40B4-BE49-F238E27FC236}">
+                <a16:creationId xmlns:a16="http://schemas.microsoft.com/office/drawing/2014/main" id="{12CE6DFF-A142-9F69-EAB7-71B6E91FE543}"/>
+              </a:ext>
+            </a:extLst>
+          </p:cNvPr>
+          <p:cNvSpPr/>
+          <p:nvPr/>
+        </p:nvSpPr>
+        <p:spPr>
+          <a:xfrm>
+            <a:off x="7107464" y="1651000"/>
+            <a:ext cx="4794250" cy="3086099"/>
+          </a:xfrm>
+          <a:prstGeom prst="rect">
+            <a:avLst/>
+          </a:prstGeom>
+          <a:solidFill>
+            <a:schemeClr val="bg1"/>
+          </a:solidFill>
+          <a:ln w="6350">
+            <a:solidFill>
+              <a:schemeClr val="tx1"/>
+            </a:solidFill>
+          </a:ln>
+        </p:spPr>
+        <p:style>
+          <a:lnRef idx="2">
+            <a:schemeClr val="accent1">
+              <a:shade val="15000"/>
+            </a:schemeClr>
+          </a:lnRef>
+          <a:fillRef idx="1">
+            <a:schemeClr val="accent1"/>
+          </a:fillRef>
+          <a:effectRef idx="0">
+            <a:schemeClr val="accent1"/>
+          </a:effectRef>
+          <a:fontRef idx="minor">
+            <a:schemeClr val="lt1"/>
+          </a:fontRef>
+        </p:style>
+        <p:txBody>
+          <a:bodyPr rtlCol="0" anchor="ctr"/>
+          <a:lstStyle/>
+          <a:p>
+            <a:pPr algn="ctr"/>
+            <a:endParaRPr lang="ko-KR" altLang="en-US" dirty="0"/>
+          </a:p>
+        </p:txBody>
+      </p:sp>
       <p:grpSp>
         <p:nvGrpSpPr>
           <p:cNvPr id="84" name="그룹 83">
@@ -3752,8 +3807,8 @@
             </a:fontRef>
           </p:style>
         </p:cxnSp>
-        <mc:AlternateContent xmlns:mc="http://schemas.openxmlformats.org/markup-compatibility/2006">
-          <mc:Choice xmlns:a14="http://schemas.microsoft.com/office/drawing/2010/main" Requires="a14">
+        <mc:AlternateContent xmlns:mc="http://schemas.openxmlformats.org/markup-compatibility/2006" xmlns:a14="http://schemas.microsoft.com/office/drawing/2010/main">
+          <mc:Choice Requires="a14">
             <p:sp>
               <p:nvSpPr>
                 <p:cNvPr id="86" name="TextBox 85">
@@ -3909,7 +3964,7 @@
               </p:txBody>
             </p:sp>
           </mc:Choice>
-          <mc:Fallback>
+          <mc:Fallback xmlns="">
             <p:sp>
               <p:nvSpPr>
                 <p:cNvPr id="86" name="TextBox 85">
@@ -4452,8 +4507,8 @@
             </a:fontRef>
           </p:style>
         </p:cxnSp>
-        <mc:AlternateContent xmlns:mc="http://schemas.openxmlformats.org/markup-compatibility/2006">
-          <mc:Choice xmlns:a14="http://schemas.microsoft.com/office/drawing/2010/main" Requires="a14">
+        <mc:AlternateContent xmlns:mc="http://schemas.openxmlformats.org/markup-compatibility/2006" xmlns:a14="http://schemas.microsoft.com/office/drawing/2010/main">
+          <mc:Choice Requires="a14">
             <p:sp>
               <p:nvSpPr>
                 <p:cNvPr id="23" name="TextBox 22">
@@ -4522,7 +4577,7 @@
               </p:txBody>
             </p:sp>
           </mc:Choice>
-          <mc:Fallback>
+          <mc:Fallback xmlns="">
             <p:sp>
               <p:nvSpPr>
                 <p:cNvPr id="23" name="TextBox 22">
@@ -4567,8 +4622,8 @@
             </p:sp>
           </mc:Fallback>
         </mc:AlternateContent>
-        <mc:AlternateContent xmlns:mc="http://schemas.openxmlformats.org/markup-compatibility/2006">
-          <mc:Choice xmlns:a14="http://schemas.microsoft.com/office/drawing/2010/main" Requires="a14">
+        <mc:AlternateContent xmlns:mc="http://schemas.openxmlformats.org/markup-compatibility/2006" xmlns:a14="http://schemas.microsoft.com/office/drawing/2010/main">
+          <mc:Choice Requires="a14">
             <p:sp>
               <p:nvSpPr>
                 <p:cNvPr id="24" name="TextBox 23">
@@ -4637,7 +4692,7 @@
               </p:txBody>
             </p:sp>
           </mc:Choice>
-          <mc:Fallback>
+          <mc:Fallback xmlns="">
             <p:sp>
               <p:nvSpPr>
                 <p:cNvPr id="24" name="TextBox 23">
@@ -4682,8 +4737,8 @@
             </p:sp>
           </mc:Fallback>
         </mc:AlternateContent>
-        <mc:AlternateContent xmlns:mc="http://schemas.openxmlformats.org/markup-compatibility/2006">
-          <mc:Choice xmlns:a14="http://schemas.microsoft.com/office/drawing/2010/main" Requires="a14">
+        <mc:AlternateContent xmlns:mc="http://schemas.openxmlformats.org/markup-compatibility/2006" xmlns:a14="http://schemas.microsoft.com/office/drawing/2010/main">
+          <mc:Choice Requires="a14">
             <p:sp>
               <p:nvSpPr>
                 <p:cNvPr id="26" name="TextBox 25">
@@ -4752,7 +4807,7 @@
               </p:txBody>
             </p:sp>
           </mc:Choice>
-          <mc:Fallback>
+          <mc:Fallback xmlns="">
             <p:sp>
               <p:nvSpPr>
                 <p:cNvPr id="26" name="TextBox 25">
@@ -4797,8 +4852,8 @@
             </p:sp>
           </mc:Fallback>
         </mc:AlternateContent>
-        <mc:AlternateContent xmlns:mc="http://schemas.openxmlformats.org/markup-compatibility/2006">
-          <mc:Choice xmlns:a14="http://schemas.microsoft.com/office/drawing/2010/main" Requires="a14">
+        <mc:AlternateContent xmlns:mc="http://schemas.openxmlformats.org/markup-compatibility/2006" xmlns:a14="http://schemas.microsoft.com/office/drawing/2010/main">
+          <mc:Choice Requires="a14">
             <p:sp>
               <p:nvSpPr>
                 <p:cNvPr id="27" name="TextBox 26">
@@ -4867,7 +4922,7 @@
               </p:txBody>
             </p:sp>
           </mc:Choice>
-          <mc:Fallback>
+          <mc:Fallback xmlns="">
             <p:sp>
               <p:nvSpPr>
                 <p:cNvPr id="27" name="TextBox 26">
@@ -4912,8 +4967,8 @@
             </p:sp>
           </mc:Fallback>
         </mc:AlternateContent>
-        <mc:AlternateContent xmlns:mc="http://schemas.openxmlformats.org/markup-compatibility/2006">
-          <mc:Choice xmlns:a14="http://schemas.microsoft.com/office/drawing/2010/main" Requires="a14">
+        <mc:AlternateContent xmlns:mc="http://schemas.openxmlformats.org/markup-compatibility/2006" xmlns:a14="http://schemas.microsoft.com/office/drawing/2010/main">
+          <mc:Choice Requires="a14">
             <p:sp>
               <p:nvSpPr>
                 <p:cNvPr id="28" name="TextBox 27">
@@ -4982,7 +5037,7 @@
               </p:txBody>
             </p:sp>
           </mc:Choice>
-          <mc:Fallback>
+          <mc:Fallback xmlns="">
             <p:sp>
               <p:nvSpPr>
                 <p:cNvPr id="28" name="TextBox 27">
@@ -5027,8 +5082,8 @@
             </p:sp>
           </mc:Fallback>
         </mc:AlternateContent>
-        <mc:AlternateContent xmlns:mc="http://schemas.openxmlformats.org/markup-compatibility/2006">
-          <mc:Choice xmlns:a14="http://schemas.microsoft.com/office/drawing/2010/main" Requires="a14">
+        <mc:AlternateContent xmlns:mc="http://schemas.openxmlformats.org/markup-compatibility/2006" xmlns:a14="http://schemas.microsoft.com/office/drawing/2010/main">
+          <mc:Choice Requires="a14">
             <p:sp>
               <p:nvSpPr>
                 <p:cNvPr id="29" name="TextBox 28">
@@ -5097,7 +5152,7 @@
               </p:txBody>
             </p:sp>
           </mc:Choice>
-          <mc:Fallback>
+          <mc:Fallback xmlns="">
             <p:sp>
               <p:nvSpPr>
                 <p:cNvPr id="29" name="TextBox 28">
@@ -5142,8 +5197,8 @@
             </p:sp>
           </mc:Fallback>
         </mc:AlternateContent>
-        <mc:AlternateContent xmlns:mc="http://schemas.openxmlformats.org/markup-compatibility/2006">
-          <mc:Choice xmlns:a14="http://schemas.microsoft.com/office/drawing/2010/main" Requires="a14">
+        <mc:AlternateContent xmlns:mc="http://schemas.openxmlformats.org/markup-compatibility/2006" xmlns:a14="http://schemas.microsoft.com/office/drawing/2010/main">
+          <mc:Choice Requires="a14">
             <p:sp>
               <p:nvSpPr>
                 <p:cNvPr id="30" name="TextBox 29">
@@ -5212,7 +5267,7 @@
               </p:txBody>
             </p:sp>
           </mc:Choice>
-          <mc:Fallback>
+          <mc:Fallback xmlns="">
             <p:sp>
               <p:nvSpPr>
                 <p:cNvPr id="30" name="TextBox 29">
@@ -5257,8 +5312,8 @@
             </p:sp>
           </mc:Fallback>
         </mc:AlternateContent>
-        <mc:AlternateContent xmlns:mc="http://schemas.openxmlformats.org/markup-compatibility/2006">
-          <mc:Choice xmlns:a14="http://schemas.microsoft.com/office/drawing/2010/main" Requires="a14">
+        <mc:AlternateContent xmlns:mc="http://schemas.openxmlformats.org/markup-compatibility/2006" xmlns:a14="http://schemas.microsoft.com/office/drawing/2010/main">
+          <mc:Choice Requires="a14">
             <p:sp>
               <p:nvSpPr>
                 <p:cNvPr id="31" name="TextBox 30">
@@ -5327,7 +5382,7 @@
               </p:txBody>
             </p:sp>
           </mc:Choice>
-          <mc:Fallback>
+          <mc:Fallback xmlns="">
             <p:sp>
               <p:nvSpPr>
                 <p:cNvPr id="31" name="TextBox 30">
@@ -5372,8 +5427,8 @@
             </p:sp>
           </mc:Fallback>
         </mc:AlternateContent>
-        <mc:AlternateContent xmlns:mc="http://schemas.openxmlformats.org/markup-compatibility/2006">
-          <mc:Choice xmlns:a14="http://schemas.microsoft.com/office/drawing/2010/main" Requires="a14">
+        <mc:AlternateContent xmlns:mc="http://schemas.openxmlformats.org/markup-compatibility/2006" xmlns:a14="http://schemas.microsoft.com/office/drawing/2010/main">
+          <mc:Choice Requires="a14">
             <p:sp>
               <p:nvSpPr>
                 <p:cNvPr id="32" name="TextBox 31">
@@ -5442,7 +5497,7 @@
               </p:txBody>
             </p:sp>
           </mc:Choice>
-          <mc:Fallback>
+          <mc:Fallback xmlns="">
             <p:sp>
               <p:nvSpPr>
                 <p:cNvPr id="32" name="TextBox 31">
@@ -5487,8 +5542,8 @@
             </p:sp>
           </mc:Fallback>
         </mc:AlternateContent>
-        <mc:AlternateContent xmlns:mc="http://schemas.openxmlformats.org/markup-compatibility/2006">
-          <mc:Choice xmlns:a14="http://schemas.microsoft.com/office/drawing/2010/main" Requires="a14">
+        <mc:AlternateContent xmlns:mc="http://schemas.openxmlformats.org/markup-compatibility/2006" xmlns:a14="http://schemas.microsoft.com/office/drawing/2010/main">
+          <mc:Choice Requires="a14">
             <p:sp>
               <p:nvSpPr>
                 <p:cNvPr id="33" name="TextBox 32">
@@ -5557,7 +5612,7 @@
               </p:txBody>
             </p:sp>
           </mc:Choice>
-          <mc:Fallback>
+          <mc:Fallback xmlns="">
             <p:sp>
               <p:nvSpPr>
                 <p:cNvPr id="33" name="TextBox 32">
@@ -5602,8 +5657,8 @@
             </p:sp>
           </mc:Fallback>
         </mc:AlternateContent>
-        <mc:AlternateContent xmlns:mc="http://schemas.openxmlformats.org/markup-compatibility/2006">
-          <mc:Choice xmlns:a14="http://schemas.microsoft.com/office/drawing/2010/main" Requires="a14">
+        <mc:AlternateContent xmlns:mc="http://schemas.openxmlformats.org/markup-compatibility/2006" xmlns:a14="http://schemas.microsoft.com/office/drawing/2010/main">
+          <mc:Choice Requires="a14">
             <p:sp>
               <p:nvSpPr>
                 <p:cNvPr id="34" name="TextBox 33">
@@ -5672,7 +5727,7 @@
               </p:txBody>
             </p:sp>
           </mc:Choice>
-          <mc:Fallback>
+          <mc:Fallback xmlns="">
             <p:sp>
               <p:nvSpPr>
                 <p:cNvPr id="34" name="TextBox 33">
@@ -5829,8 +5884,8 @@
             </a:fontRef>
           </p:style>
         </p:cxnSp>
-        <mc:AlternateContent xmlns:mc="http://schemas.openxmlformats.org/markup-compatibility/2006">
-          <mc:Choice xmlns:a14="http://schemas.microsoft.com/office/drawing/2010/main" Requires="a14">
+        <mc:AlternateContent xmlns:mc="http://schemas.openxmlformats.org/markup-compatibility/2006" xmlns:a14="http://schemas.microsoft.com/office/drawing/2010/main">
+          <mc:Choice Requires="a14">
             <p:sp>
               <p:nvSpPr>
                 <p:cNvPr id="41" name="TextBox 40">
@@ -5986,7 +6041,7 @@
               </p:txBody>
             </p:sp>
           </mc:Choice>
-          <mc:Fallback>
+          <mc:Fallback xmlns="">
             <p:sp>
               <p:nvSpPr>
                 <p:cNvPr id="41" name="TextBox 40">
@@ -6096,8 +6151,8 @@
             </a:fontRef>
           </p:style>
         </p:cxnSp>
-        <mc:AlternateContent xmlns:mc="http://schemas.openxmlformats.org/markup-compatibility/2006">
-          <mc:Choice xmlns:a14="http://schemas.microsoft.com/office/drawing/2010/main" Requires="a14">
+        <mc:AlternateContent xmlns:mc="http://schemas.openxmlformats.org/markup-compatibility/2006" xmlns:a14="http://schemas.microsoft.com/office/drawing/2010/main">
+          <mc:Choice Requires="a14">
             <p:sp>
               <p:nvSpPr>
                 <p:cNvPr id="49" name="TextBox 48">
@@ -6253,7 +6308,7 @@
               </p:txBody>
             </p:sp>
           </mc:Choice>
-          <mc:Fallback>
+          <mc:Fallback xmlns="">
             <p:sp>
               <p:nvSpPr>
                 <p:cNvPr id="49" name="TextBox 48">
@@ -6299,8 +6354,8 @@
           </mc:Fallback>
         </mc:AlternateContent>
       </p:grpSp>
-      <mc:AlternateContent xmlns:mc="http://schemas.openxmlformats.org/markup-compatibility/2006">
-        <mc:Choice xmlns:a14="http://schemas.microsoft.com/office/drawing/2010/main" Requires="a14">
+      <mc:AlternateContent xmlns:mc="http://schemas.openxmlformats.org/markup-compatibility/2006" xmlns:a14="http://schemas.microsoft.com/office/drawing/2010/main">
+        <mc:Choice Requires="a14">
           <p:sp>
             <p:nvSpPr>
               <p:cNvPr id="51" name="TextBox 50">
@@ -6361,7 +6416,7 @@
             </p:txBody>
           </p:sp>
         </mc:Choice>
-        <mc:Fallback>
+        <mc:Fallback xmlns="">
           <p:sp>
             <p:nvSpPr>
               <p:cNvPr id="51" name="TextBox 50">
@@ -6406,60 +6461,6 @@
           </p:sp>
         </mc:Fallback>
       </mc:AlternateContent>
-      <p:sp>
-        <p:nvSpPr>
-          <p:cNvPr id="53" name="직사각형 52">
-            <a:extLst>
-              <a:ext uri="{FF2B5EF4-FFF2-40B4-BE49-F238E27FC236}">
-                <a16:creationId xmlns:a16="http://schemas.microsoft.com/office/drawing/2014/main" id="{12CE6DFF-A142-9F69-EAB7-71B6E91FE543}"/>
-              </a:ext>
-            </a:extLst>
-          </p:cNvPr>
-          <p:cNvSpPr/>
-          <p:nvPr/>
-        </p:nvSpPr>
-        <p:spPr>
-          <a:xfrm>
-            <a:off x="7107464" y="1651000"/>
-            <a:ext cx="4794250" cy="3086099"/>
-          </a:xfrm>
-          <a:prstGeom prst="rect">
-            <a:avLst/>
-          </a:prstGeom>
-          <a:solidFill>
-            <a:schemeClr val="bg1"/>
-          </a:solidFill>
-          <a:ln w="6350">
-            <a:solidFill>
-              <a:schemeClr val="tx1"/>
-            </a:solidFill>
-          </a:ln>
-        </p:spPr>
-        <p:style>
-          <a:lnRef idx="2">
-            <a:schemeClr val="accent1">
-              <a:shade val="15000"/>
-            </a:schemeClr>
-          </a:lnRef>
-          <a:fillRef idx="1">
-            <a:schemeClr val="accent1"/>
-          </a:fillRef>
-          <a:effectRef idx="0">
-            <a:schemeClr val="accent1"/>
-          </a:effectRef>
-          <a:fontRef idx="minor">
-            <a:schemeClr val="lt1"/>
-          </a:fontRef>
-        </p:style>
-        <p:txBody>
-          <a:bodyPr rtlCol="0" anchor="ctr"/>
-          <a:lstStyle/>
-          <a:p>
-            <a:pPr algn="ctr"/>
-            <a:endParaRPr lang="ko-KR" altLang="en-US"/>
-          </a:p>
-        </p:txBody>
-      </p:sp>
       <p:cxnSp>
         <p:nvCxnSpPr>
           <p:cNvPr id="61" name="직선 연결선 60">
@@ -6504,8 +6505,8 @@
           </a:fontRef>
         </p:style>
       </p:cxnSp>
-      <mc:AlternateContent xmlns:mc="http://schemas.openxmlformats.org/markup-compatibility/2006">
-        <mc:Choice xmlns:a14="http://schemas.microsoft.com/office/drawing/2010/main" Requires="a14">
+      <mc:AlternateContent xmlns:mc="http://schemas.openxmlformats.org/markup-compatibility/2006" xmlns:a14="http://schemas.microsoft.com/office/drawing/2010/main">
+        <mc:Choice Requires="a14">
           <p:sp>
             <p:nvSpPr>
               <p:cNvPr id="63" name="TextBox 62">
@@ -6574,7 +6575,7 @@
             </p:txBody>
           </p:sp>
         </mc:Choice>
-        <mc:Fallback>
+        <mc:Fallback xmlns="">
           <p:sp>
             <p:nvSpPr>
               <p:cNvPr id="63" name="TextBox 62">
@@ -6619,8 +6620,8 @@
           </p:sp>
         </mc:Fallback>
       </mc:AlternateContent>
-      <mc:AlternateContent xmlns:mc="http://schemas.openxmlformats.org/markup-compatibility/2006">
-        <mc:Choice xmlns:a14="http://schemas.microsoft.com/office/drawing/2010/main" Requires="a14">
+      <mc:AlternateContent xmlns:mc="http://schemas.openxmlformats.org/markup-compatibility/2006" xmlns:a14="http://schemas.microsoft.com/office/drawing/2010/main">
+        <mc:Choice Requires="a14">
           <p:sp>
             <p:nvSpPr>
               <p:cNvPr id="64" name="TextBox 63">
@@ -6670,7 +6671,7 @@
             </p:txBody>
           </p:sp>
         </mc:Choice>
-        <mc:Fallback>
+        <mc:Fallback xmlns="">
           <p:sp>
             <p:nvSpPr>
               <p:cNvPr id="64" name="TextBox 63">
@@ -6715,8 +6716,8 @@
           </p:sp>
         </mc:Fallback>
       </mc:AlternateContent>
-      <mc:AlternateContent xmlns:mc="http://schemas.openxmlformats.org/markup-compatibility/2006">
-        <mc:Choice xmlns:a14="http://schemas.microsoft.com/office/drawing/2010/main" Requires="a14">
+      <mc:AlternateContent xmlns:mc="http://schemas.openxmlformats.org/markup-compatibility/2006" xmlns:a14="http://schemas.microsoft.com/office/drawing/2010/main">
+        <mc:Choice Requires="a14">
           <p:sp>
             <p:nvSpPr>
               <p:cNvPr id="65" name="TextBox 64">
@@ -6745,6 +6746,7 @@
               </a:bodyPr>
               <a:lstStyle/>
               <a:p>
+                <a:pPr/>
                 <a14:m>
                   <m:oMathPara xmlns:m="http://schemas.openxmlformats.org/officeDocument/2006/math">
                     <m:oMathParaPr>
@@ -6784,7 +6786,7 @@
             </p:txBody>
           </p:sp>
         </mc:Choice>
-        <mc:Fallback>
+        <mc:Fallback xmlns="">
           <p:sp>
             <p:nvSpPr>
               <p:cNvPr id="65" name="TextBox 64">
@@ -6829,8 +6831,8 @@
           </p:sp>
         </mc:Fallback>
       </mc:AlternateContent>
-      <mc:AlternateContent xmlns:mc="http://schemas.openxmlformats.org/markup-compatibility/2006">
-        <mc:Choice xmlns:a14="http://schemas.microsoft.com/office/drawing/2010/main" Requires="a14">
+      <mc:AlternateContent xmlns:mc="http://schemas.openxmlformats.org/markup-compatibility/2006" xmlns:a14="http://schemas.microsoft.com/office/drawing/2010/main">
+        <mc:Choice Requires="a14">
           <p:sp>
             <p:nvSpPr>
               <p:cNvPr id="66" name="TextBox 65">
@@ -6880,7 +6882,7 @@
             </p:txBody>
           </p:sp>
         </mc:Choice>
-        <mc:Fallback>
+        <mc:Fallback xmlns="">
           <p:sp>
             <p:nvSpPr>
               <p:cNvPr id="66" name="TextBox 65">
@@ -6925,8 +6927,8 @@
           </p:sp>
         </mc:Fallback>
       </mc:AlternateContent>
-      <mc:AlternateContent xmlns:mc="http://schemas.openxmlformats.org/markup-compatibility/2006">
-        <mc:Choice xmlns:a14="http://schemas.microsoft.com/office/drawing/2010/main" Requires="a14">
+      <mc:AlternateContent xmlns:mc="http://schemas.openxmlformats.org/markup-compatibility/2006" xmlns:a14="http://schemas.microsoft.com/office/drawing/2010/main">
+        <mc:Choice Requires="a14">
           <p:sp>
             <p:nvSpPr>
               <p:cNvPr id="69" name="TextBox 68">
@@ -6988,7 +6990,7 @@
             </p:txBody>
           </p:sp>
         </mc:Choice>
-        <mc:Fallback>
+        <mc:Fallback xmlns="">
           <p:sp>
             <p:nvSpPr>
               <p:cNvPr id="69" name="TextBox 68">
@@ -7033,8 +7035,8 @@
           </p:sp>
         </mc:Fallback>
       </mc:AlternateContent>
-      <mc:AlternateContent xmlns:mc="http://schemas.openxmlformats.org/markup-compatibility/2006">
-        <mc:Choice xmlns:a14="http://schemas.microsoft.com/office/drawing/2010/main" Requires="a14">
+      <mc:AlternateContent xmlns:mc="http://schemas.openxmlformats.org/markup-compatibility/2006" xmlns:a14="http://schemas.microsoft.com/office/drawing/2010/main">
+        <mc:Choice Requires="a14">
           <p:sp>
             <p:nvSpPr>
               <p:cNvPr id="70" name="TextBox 69">
@@ -7103,7 +7105,7 @@
             </p:txBody>
           </p:sp>
         </mc:Choice>
-        <mc:Fallback>
+        <mc:Fallback xmlns="">
           <p:sp>
             <p:nvSpPr>
               <p:cNvPr id="70" name="TextBox 69">
@@ -7148,8 +7150,8 @@
           </p:sp>
         </mc:Fallback>
       </mc:AlternateContent>
-      <mc:AlternateContent xmlns:mc="http://schemas.openxmlformats.org/markup-compatibility/2006">
-        <mc:Choice xmlns:a14="http://schemas.microsoft.com/office/drawing/2010/main" Requires="a14">
+      <mc:AlternateContent xmlns:mc="http://schemas.openxmlformats.org/markup-compatibility/2006" xmlns:a14="http://schemas.microsoft.com/office/drawing/2010/main">
+        <mc:Choice Requires="a14">
           <p:sp>
             <p:nvSpPr>
               <p:cNvPr id="71" name="TextBox 70">
@@ -7218,7 +7220,7 @@
             </p:txBody>
           </p:sp>
         </mc:Choice>
-        <mc:Fallback>
+        <mc:Fallback xmlns="">
           <p:sp>
             <p:nvSpPr>
               <p:cNvPr id="71" name="TextBox 70">
@@ -7553,8 +7555,8 @@
             </a:fontRef>
           </p:style>
         </p:cxnSp>
-        <mc:AlternateContent xmlns:mc="http://schemas.openxmlformats.org/markup-compatibility/2006">
-          <mc:Choice xmlns:a14="http://schemas.microsoft.com/office/drawing/2010/main" Requires="a14">
+        <mc:AlternateContent xmlns:mc="http://schemas.openxmlformats.org/markup-compatibility/2006" xmlns:a14="http://schemas.microsoft.com/office/drawing/2010/main">
+          <mc:Choice Requires="a14">
             <p:sp>
               <p:nvSpPr>
                 <p:cNvPr id="89" name="TextBox 88">
@@ -7710,7 +7712,7 @@
               </p:txBody>
             </p:sp>
           </mc:Choice>
-          <mc:Fallback>
+          <mc:Fallback xmlns="">
             <p:sp>
               <p:nvSpPr>
                 <p:cNvPr id="89" name="TextBox 88">
@@ -7756,8 +7758,8 @@
           </mc:Fallback>
         </mc:AlternateContent>
       </p:grpSp>
-      <mc:AlternateContent xmlns:mc="http://schemas.openxmlformats.org/markup-compatibility/2006">
-        <mc:Choice xmlns:a14="http://schemas.microsoft.com/office/drawing/2010/main" Requires="a14">
+      <mc:AlternateContent xmlns:mc="http://schemas.openxmlformats.org/markup-compatibility/2006" xmlns:a14="http://schemas.microsoft.com/office/drawing/2010/main">
+        <mc:Choice Requires="a14">
           <p:sp>
             <p:nvSpPr>
               <p:cNvPr id="90" name="TextBox 89">
@@ -7786,6 +7788,7 @@
               </a:bodyPr>
               <a:lstStyle/>
               <a:p>
+                <a:pPr/>
                 <a14:m>
                   <m:oMathPara xmlns:m="http://schemas.openxmlformats.org/officeDocument/2006/math">
                     <m:oMathParaPr>
@@ -7825,7 +7828,7 @@
             </p:txBody>
           </p:sp>
         </mc:Choice>
-        <mc:Fallback>
+        <mc:Fallback xmlns="">
           <p:sp>
             <p:nvSpPr>
               <p:cNvPr id="90" name="TextBox 89">
@@ -7914,8 +7917,8 @@
           </a:fontRef>
         </p:style>
       </p:cxnSp>
-      <mc:AlternateContent xmlns:mc="http://schemas.openxmlformats.org/markup-compatibility/2006">
-        <mc:Choice xmlns:a14="http://schemas.microsoft.com/office/drawing/2010/main" Requires="a14">
+      <mc:AlternateContent xmlns:mc="http://schemas.openxmlformats.org/markup-compatibility/2006" xmlns:a14="http://schemas.microsoft.com/office/drawing/2010/main">
+        <mc:Choice Requires="a14">
           <p:sp>
             <p:nvSpPr>
               <p:cNvPr id="93" name="TextBox 92">
@@ -7965,7 +7968,7 @@
             </p:txBody>
           </p:sp>
         </mc:Choice>
-        <mc:Fallback>
+        <mc:Fallback xmlns="">
           <p:sp>
             <p:nvSpPr>
               <p:cNvPr id="93" name="TextBox 92">
@@ -8010,8 +8013,8 @@
           </p:sp>
         </mc:Fallback>
       </mc:AlternateContent>
-      <mc:AlternateContent xmlns:mc="http://schemas.openxmlformats.org/markup-compatibility/2006">
-        <mc:Choice xmlns:a14="http://schemas.microsoft.com/office/drawing/2010/main" Requires="a14">
+      <mc:AlternateContent xmlns:mc="http://schemas.openxmlformats.org/markup-compatibility/2006" xmlns:a14="http://schemas.microsoft.com/office/drawing/2010/main">
+        <mc:Choice Requires="a14">
           <p:sp>
             <p:nvSpPr>
               <p:cNvPr id="94" name="TextBox 93">
@@ -8080,7 +8083,7 @@
             </p:txBody>
           </p:sp>
         </mc:Choice>
-        <mc:Fallback>
+        <mc:Fallback xmlns="">
           <p:sp>
             <p:nvSpPr>
               <p:cNvPr id="94" name="TextBox 93">
@@ -8125,8 +8128,8 @@
           </p:sp>
         </mc:Fallback>
       </mc:AlternateContent>
-      <mc:AlternateContent xmlns:mc="http://schemas.openxmlformats.org/markup-compatibility/2006">
-        <mc:Choice xmlns:a14="http://schemas.microsoft.com/office/drawing/2010/main" Requires="a14">
+      <mc:AlternateContent xmlns:mc="http://schemas.openxmlformats.org/markup-compatibility/2006" xmlns:a14="http://schemas.microsoft.com/office/drawing/2010/main">
+        <mc:Choice Requires="a14">
           <p:sp>
             <p:nvSpPr>
               <p:cNvPr id="95" name="TextBox 94">
@@ -8187,7 +8190,7 @@
             </p:txBody>
           </p:sp>
         </mc:Choice>
-        <mc:Fallback>
+        <mc:Fallback xmlns="">
           <p:sp>
             <p:nvSpPr>
               <p:cNvPr id="95" name="TextBox 94">
@@ -8236,6 +8239,839 @@
     <p:extLst>
       <p:ext uri="{BB962C8B-B14F-4D97-AF65-F5344CB8AC3E}">
         <p14:creationId xmlns:p14="http://schemas.microsoft.com/office/powerpoint/2010/main" val="627590367"/>
+      </p:ext>
+    </p:extLst>
+  </p:cSld>
+  <p:clrMapOvr>
+    <a:masterClrMapping/>
+  </p:clrMapOvr>
+</p:sld>
+</file>
+
+<file path=ppt/slides/slide4.xml><?xml version="1.0" encoding="utf-8"?>
+<p:sld xmlns:a="http://schemas.openxmlformats.org/drawingml/2006/main" xmlns:r="http://schemas.openxmlformats.org/officeDocument/2006/relationships" xmlns:p="http://schemas.openxmlformats.org/presentationml/2006/main">
+  <p:cSld>
+    <p:spTree>
+      <p:nvGrpSpPr>
+        <p:cNvPr id="1" name=""/>
+        <p:cNvGrpSpPr/>
+        <p:nvPr/>
+      </p:nvGrpSpPr>
+      <p:grpSpPr>
+        <a:xfrm>
+          <a:off x="0" y="0"/>
+          <a:ext cx="0" cy="0"/>
+          <a:chOff x="0" y="0"/>
+          <a:chExt cx="0" cy="0"/>
+        </a:xfrm>
+      </p:grpSpPr>
+      <p:sp>
+        <p:nvSpPr>
+          <p:cNvPr id="29" name="직사각형 28">
+            <a:extLst>
+              <a:ext uri="{FF2B5EF4-FFF2-40B4-BE49-F238E27FC236}">
+                <a16:creationId xmlns:a16="http://schemas.microsoft.com/office/drawing/2014/main" id="{F4B707BA-A0BA-2A50-96F2-00B8054831CF}"/>
+              </a:ext>
+            </a:extLst>
+          </p:cNvPr>
+          <p:cNvSpPr/>
+          <p:nvPr/>
+        </p:nvSpPr>
+        <p:spPr>
+          <a:xfrm>
+            <a:off x="1748065" y="2118783"/>
+            <a:ext cx="3792342" cy="2796116"/>
+          </a:xfrm>
+          <a:prstGeom prst="rect">
+            <a:avLst/>
+          </a:prstGeom>
+          <a:solidFill>
+            <a:schemeClr val="bg1"/>
+          </a:solidFill>
+          <a:ln w="6350">
+            <a:solidFill>
+              <a:schemeClr val="tx1"/>
+            </a:solidFill>
+          </a:ln>
+        </p:spPr>
+        <p:style>
+          <a:lnRef idx="2">
+            <a:schemeClr val="accent1">
+              <a:shade val="15000"/>
+            </a:schemeClr>
+          </a:lnRef>
+          <a:fillRef idx="1">
+            <a:schemeClr val="accent1"/>
+          </a:fillRef>
+          <a:effectRef idx="0">
+            <a:schemeClr val="accent1"/>
+          </a:effectRef>
+          <a:fontRef idx="minor">
+            <a:schemeClr val="lt1"/>
+          </a:fontRef>
+        </p:style>
+        <p:txBody>
+          <a:bodyPr rtlCol="0" anchor="ctr"/>
+          <a:lstStyle/>
+          <a:p>
+            <a:pPr algn="ctr"/>
+            <a:endParaRPr lang="ko-KR" altLang="en-US" dirty="0"/>
+          </a:p>
+        </p:txBody>
+      </p:sp>
+      <p:cxnSp>
+        <p:nvCxnSpPr>
+          <p:cNvPr id="33" name="직선 연결선 32">
+            <a:extLst>
+              <a:ext uri="{FF2B5EF4-FFF2-40B4-BE49-F238E27FC236}">
+                <a16:creationId xmlns:a16="http://schemas.microsoft.com/office/drawing/2014/main" id="{ABD8E5D1-C18C-AAD7-ADCB-DD27C5ABB682}"/>
+              </a:ext>
+            </a:extLst>
+          </p:cNvPr>
+          <p:cNvCxnSpPr>
+            <a:cxnSpLocks/>
+          </p:cNvCxnSpPr>
+          <p:nvPr/>
+        </p:nvCxnSpPr>
+        <p:spPr>
+          <a:xfrm>
+            <a:off x="3228984" y="2621840"/>
+            <a:ext cx="0" cy="2268000"/>
+          </a:xfrm>
+          <a:prstGeom prst="line">
+            <a:avLst/>
+          </a:prstGeom>
+          <a:ln w="6350">
+            <a:solidFill>
+              <a:srgbClr val="070B12"/>
+            </a:solidFill>
+            <a:prstDash val="dash"/>
+          </a:ln>
+        </p:spPr>
+        <p:style>
+          <a:lnRef idx="2">
+            <a:schemeClr val="accent1"/>
+          </a:lnRef>
+          <a:fillRef idx="0">
+            <a:schemeClr val="accent1"/>
+          </a:fillRef>
+          <a:effectRef idx="1">
+            <a:schemeClr val="accent1"/>
+          </a:effectRef>
+          <a:fontRef idx="minor">
+            <a:schemeClr val="tx1"/>
+          </a:fontRef>
+        </p:style>
+      </p:cxnSp>
+      <mc:AlternateContent xmlns:mc="http://schemas.openxmlformats.org/markup-compatibility/2006">
+        <mc:Choice xmlns:a14="http://schemas.microsoft.com/office/drawing/2010/main" Requires="a14">
+          <p:sp>
+            <p:nvSpPr>
+              <p:cNvPr id="37" name="TextBox 36">
+                <a:extLst>
+                  <a:ext uri="{FF2B5EF4-FFF2-40B4-BE49-F238E27FC236}">
+                    <a16:creationId xmlns:a16="http://schemas.microsoft.com/office/drawing/2014/main" id="{C0EBD0AE-5CC5-269C-4F90-CD59EDCA7167}"/>
+                  </a:ext>
+                </a:extLst>
+              </p:cNvPr>
+              <p:cNvSpPr txBox="1"/>
+              <p:nvPr/>
+            </p:nvSpPr>
+            <p:spPr>
+              <a:xfrm>
+                <a:off x="1410881" y="4852118"/>
+                <a:ext cx="494030" cy="311817"/>
+              </a:xfrm>
+              <a:prstGeom prst="rect">
+                <a:avLst/>
+              </a:prstGeom>
+              <a:noFill/>
+            </p:spPr>
+            <p:txBody>
+              <a:bodyPr wrap="square">
+                <a:spAutoFit/>
+              </a:bodyPr>
+              <a:lstStyle/>
+              <a:p>
+                <a:pPr/>
+                <a14:m>
+                  <m:oMathPara xmlns:m="http://schemas.openxmlformats.org/officeDocument/2006/math">
+                    <m:oMathParaPr>
+                      <m:jc m:val="centerGroup"/>
+                    </m:oMathParaPr>
+                    <m:oMath xmlns:m="http://schemas.openxmlformats.org/officeDocument/2006/math">
+                      <m:r>
+                        <a:rPr lang="en-US" altLang="ko-KR" sz="1400" b="0" i="1" smtClean="0">
+                          <a:latin typeface="Cambria Math" panose="02040503050406030204" pitchFamily="18" charset="0"/>
+                        </a:rPr>
+                        <m:t>𝑂</m:t>
+                      </m:r>
+                    </m:oMath>
+                  </m:oMathPara>
+                </a14:m>
+                <a:endParaRPr lang="ko-KR" altLang="en-US" sz="1400" dirty="0"/>
+              </a:p>
+            </p:txBody>
+          </p:sp>
+        </mc:Choice>
+        <mc:Fallback>
+          <p:sp>
+            <p:nvSpPr>
+              <p:cNvPr id="37" name="TextBox 36">
+                <a:extLst>
+                  <a:ext uri="{FF2B5EF4-FFF2-40B4-BE49-F238E27FC236}">
+                    <a16:creationId xmlns:a16="http://schemas.microsoft.com/office/drawing/2014/main" id="{C0EBD0AE-5CC5-269C-4F90-CD59EDCA7167}"/>
+                  </a:ext>
+                </a:extLst>
+              </p:cNvPr>
+              <p:cNvSpPr txBox="1">
+                <a:spLocks noRot="1" noChangeAspect="1" noMove="1" noResize="1" noEditPoints="1" noAdjustHandles="1" noChangeArrowheads="1" noChangeShapeType="1" noTextEdit="1"/>
+              </p:cNvSpPr>
+              <p:nvPr/>
+            </p:nvSpPr>
+            <p:spPr>
+              <a:xfrm>
+                <a:off x="1410881" y="4852118"/>
+                <a:ext cx="494030" cy="311817"/>
+              </a:xfrm>
+              <a:prstGeom prst="rect">
+                <a:avLst/>
+              </a:prstGeom>
+              <a:blipFill>
+                <a:blip r:embed="rId2"/>
+                <a:stretch>
+                  <a:fillRect/>
+                </a:stretch>
+              </a:blipFill>
+            </p:spPr>
+            <p:txBody>
+              <a:bodyPr/>
+              <a:lstStyle/>
+              <a:p>
+                <a:r>
+                  <a:rPr lang="ko-KR" altLang="en-US">
+                    <a:noFill/>
+                  </a:rPr>
+                  <a:t> </a:t>
+                </a:r>
+              </a:p>
+            </p:txBody>
+          </p:sp>
+        </mc:Fallback>
+      </mc:AlternateContent>
+      <p:sp>
+        <p:nvSpPr>
+          <p:cNvPr id="41" name="원호 40">
+            <a:extLst>
+              <a:ext uri="{FF2B5EF4-FFF2-40B4-BE49-F238E27FC236}">
+                <a16:creationId xmlns:a16="http://schemas.microsoft.com/office/drawing/2014/main" id="{FA2504EC-0465-91E5-BF87-72798758B06F}"/>
+              </a:ext>
+            </a:extLst>
+          </p:cNvPr>
+          <p:cNvSpPr/>
+          <p:nvPr/>
+        </p:nvSpPr>
+        <p:spPr>
+          <a:xfrm rot="11917283">
+            <a:off x="1896052" y="-1939028"/>
+            <a:ext cx="7819679" cy="6885185"/>
+          </a:xfrm>
+          <a:prstGeom prst="arc">
+            <a:avLst>
+              <a:gd name="adj1" fmla="val 15704493"/>
+              <a:gd name="adj2" fmla="val 19417255"/>
+            </a:avLst>
+          </a:prstGeom>
+        </p:spPr>
+        <p:style>
+          <a:lnRef idx="2">
+            <a:schemeClr val="accent1"/>
+          </a:lnRef>
+          <a:fillRef idx="0">
+            <a:schemeClr val="accent1"/>
+          </a:fillRef>
+          <a:effectRef idx="1">
+            <a:schemeClr val="accent1"/>
+          </a:effectRef>
+          <a:fontRef idx="minor">
+            <a:schemeClr val="tx1"/>
+          </a:fontRef>
+        </p:style>
+        <p:txBody>
+          <a:bodyPr rtlCol="0" anchor="ctr"/>
+          <a:lstStyle/>
+          <a:p>
+            <a:pPr algn="ctr"/>
+            <a:endParaRPr lang="ko-KR" altLang="en-US"/>
+          </a:p>
+        </p:txBody>
+      </p:sp>
+      <p:sp>
+        <p:nvSpPr>
+          <p:cNvPr id="45" name="원호 44">
+            <a:extLst>
+              <a:ext uri="{FF2B5EF4-FFF2-40B4-BE49-F238E27FC236}">
+                <a16:creationId xmlns:a16="http://schemas.microsoft.com/office/drawing/2014/main" id="{F22DF1F0-FC12-EB13-6E75-6AB4B5512EEC}"/>
+              </a:ext>
+            </a:extLst>
+          </p:cNvPr>
+          <p:cNvSpPr/>
+          <p:nvPr/>
+        </p:nvSpPr>
+        <p:spPr>
+          <a:xfrm rot="9006992" flipH="1">
+            <a:off x="-2641474" y="-2155750"/>
+            <a:ext cx="7639360" cy="6915733"/>
+          </a:xfrm>
+          <a:prstGeom prst="arc">
+            <a:avLst>
+              <a:gd name="adj1" fmla="val 15123390"/>
+              <a:gd name="adj2" fmla="val 18493996"/>
+            </a:avLst>
+          </a:prstGeom>
+        </p:spPr>
+        <p:style>
+          <a:lnRef idx="2">
+            <a:schemeClr val="accent1"/>
+          </a:lnRef>
+          <a:fillRef idx="0">
+            <a:schemeClr val="accent1"/>
+          </a:fillRef>
+          <a:effectRef idx="1">
+            <a:schemeClr val="accent1"/>
+          </a:effectRef>
+          <a:fontRef idx="minor">
+            <a:schemeClr val="tx1"/>
+          </a:fontRef>
+        </p:style>
+        <p:txBody>
+          <a:bodyPr rtlCol="0" anchor="ctr"/>
+          <a:lstStyle/>
+          <a:p>
+            <a:pPr algn="ctr"/>
+            <a:endParaRPr lang="ko-KR" altLang="en-US"/>
+          </a:p>
+        </p:txBody>
+      </p:sp>
+      <mc:AlternateContent xmlns:mc="http://schemas.openxmlformats.org/markup-compatibility/2006">
+        <mc:Choice xmlns:a14="http://schemas.microsoft.com/office/drawing/2010/main" Requires="a14">
+          <p:sp>
+            <p:nvSpPr>
+              <p:cNvPr id="53" name="TextBox 52">
+                <a:extLst>
+                  <a:ext uri="{FF2B5EF4-FFF2-40B4-BE49-F238E27FC236}">
+                    <a16:creationId xmlns:a16="http://schemas.microsoft.com/office/drawing/2014/main" id="{1007BC3B-9F98-9D1F-DBF7-33E4747635BA}"/>
+                  </a:ext>
+                </a:extLst>
+              </p:cNvPr>
+              <p:cNvSpPr txBox="1"/>
+              <p:nvPr/>
+            </p:nvSpPr>
+            <p:spPr>
+              <a:xfrm>
+                <a:off x="4599121" y="4852118"/>
+                <a:ext cx="1206770" cy="307777"/>
+              </a:xfrm>
+              <a:prstGeom prst="rect">
+                <a:avLst/>
+              </a:prstGeom>
+              <a:noFill/>
+            </p:spPr>
+            <p:txBody>
+              <a:bodyPr wrap="square">
+                <a:spAutoFit/>
+              </a:bodyPr>
+              <a:lstStyle/>
+              <a:p>
+                <a:pPr algn="ctr"/>
+                <a14:m>
+                  <m:oMathPara xmlns:m="http://schemas.openxmlformats.org/officeDocument/2006/math">
+                    <m:oMathParaPr>
+                      <m:jc m:val="centerGroup"/>
+                    </m:oMathParaPr>
+                    <m:oMath xmlns:m="http://schemas.openxmlformats.org/officeDocument/2006/math">
+                      <m:r>
+                        <a:rPr lang="en-US" altLang="ko-KR" sz="1400" b="0" i="1" smtClean="0">
+                          <a:latin typeface="Cambria Math" panose="02040503050406030204" pitchFamily="18" charset="0"/>
+                        </a:rPr>
+                        <m:t>𝑁</m:t>
+                      </m:r>
+                    </m:oMath>
+                  </m:oMathPara>
+                </a14:m>
+                <a:endParaRPr lang="ko-KR" altLang="en-US" sz="1100" dirty="0"/>
+              </a:p>
+            </p:txBody>
+          </p:sp>
+        </mc:Choice>
+        <mc:Fallback>
+          <p:sp>
+            <p:nvSpPr>
+              <p:cNvPr id="53" name="TextBox 52">
+                <a:extLst>
+                  <a:ext uri="{FF2B5EF4-FFF2-40B4-BE49-F238E27FC236}">
+                    <a16:creationId xmlns:a16="http://schemas.microsoft.com/office/drawing/2014/main" id="{1007BC3B-9F98-9D1F-DBF7-33E4747635BA}"/>
+                  </a:ext>
+                </a:extLst>
+              </p:cNvPr>
+              <p:cNvSpPr txBox="1">
+                <a:spLocks noRot="1" noChangeAspect="1" noMove="1" noResize="1" noEditPoints="1" noAdjustHandles="1" noChangeArrowheads="1" noChangeShapeType="1" noTextEdit="1"/>
+              </p:cNvSpPr>
+              <p:nvPr/>
+            </p:nvSpPr>
+            <p:spPr>
+              <a:xfrm>
+                <a:off x="4599121" y="4852118"/>
+                <a:ext cx="1206770" cy="307777"/>
+              </a:xfrm>
+              <a:prstGeom prst="rect">
+                <a:avLst/>
+              </a:prstGeom>
+              <a:blipFill>
+                <a:blip r:embed="rId3"/>
+                <a:stretch>
+                  <a:fillRect/>
+                </a:stretch>
+              </a:blipFill>
+            </p:spPr>
+            <p:txBody>
+              <a:bodyPr/>
+              <a:lstStyle/>
+              <a:p>
+                <a:r>
+                  <a:rPr lang="ko-KR" altLang="en-US">
+                    <a:noFill/>
+                  </a:rPr>
+                  <a:t> </a:t>
+                </a:r>
+              </a:p>
+            </p:txBody>
+          </p:sp>
+        </mc:Fallback>
+      </mc:AlternateContent>
+      <p:sp>
+        <p:nvSpPr>
+          <p:cNvPr id="55" name="TextBox 54">
+            <a:extLst>
+              <a:ext uri="{FF2B5EF4-FFF2-40B4-BE49-F238E27FC236}">
+                <a16:creationId xmlns:a16="http://schemas.microsoft.com/office/drawing/2014/main" id="{3844B215-6CA2-88EA-5769-10CF53DD7F03}"/>
+              </a:ext>
+            </a:extLst>
+          </p:cNvPr>
+          <p:cNvSpPr txBox="1"/>
+          <p:nvPr/>
+        </p:nvSpPr>
+        <p:spPr>
+          <a:xfrm>
+            <a:off x="5479989" y="4698627"/>
+            <a:ext cx="1196581" cy="430887"/>
+          </a:xfrm>
+          <a:prstGeom prst="rect">
+            <a:avLst/>
+          </a:prstGeom>
+          <a:noFill/>
+        </p:spPr>
+        <p:txBody>
+          <a:bodyPr wrap="square">
+            <a:spAutoFit/>
+          </a:bodyPr>
+          <a:lstStyle/>
+          <a:p>
+            <a:r>
+              <a:rPr lang="ko-KR" altLang="en-US" sz="1100" dirty="0"/>
+              <a:t>의결에 </a:t>
+            </a:r>
+            <a:endParaRPr lang="en-US" altLang="ko-KR" sz="1100" dirty="0"/>
+          </a:p>
+          <a:p>
+            <a:r>
+              <a:rPr lang="ko-KR" altLang="en-US" sz="1100" dirty="0"/>
+              <a:t>필요한 표수</a:t>
+            </a:r>
+          </a:p>
+        </p:txBody>
+      </p:sp>
+      <p:pic>
+        <p:nvPicPr>
+          <p:cNvPr id="57" name="그림 56">
+            <a:extLst>
+              <a:ext uri="{FF2B5EF4-FFF2-40B4-BE49-F238E27FC236}">
+                <a16:creationId xmlns:a16="http://schemas.microsoft.com/office/drawing/2014/main" id="{27FA3402-A08B-51EF-4E90-ECF59EB40B97}"/>
+              </a:ext>
+            </a:extLst>
+          </p:cNvPr>
+          <p:cNvPicPr>
+            <a:picLocks noChangeAspect="1"/>
+          </p:cNvPicPr>
+          <p:nvPr/>
+        </p:nvPicPr>
+        <p:blipFill>
+          <a:blip r:embed="rId4"/>
+          <a:stretch>
+            <a:fillRect/>
+          </a:stretch>
+        </p:blipFill>
+        <p:spPr>
+          <a:xfrm rot="410933">
+            <a:off x="2504975" y="2266514"/>
+            <a:ext cx="1628300" cy="396274"/>
+          </a:xfrm>
+          <a:prstGeom prst="rect">
+            <a:avLst/>
+          </a:prstGeom>
+        </p:spPr>
+      </p:pic>
+      <mc:AlternateContent xmlns:mc="http://schemas.openxmlformats.org/markup-compatibility/2006">
+        <mc:Choice xmlns:a14="http://schemas.microsoft.com/office/drawing/2010/main" Requires="a14">
+          <p:sp>
+            <p:nvSpPr>
+              <p:cNvPr id="59" name="TextBox 58">
+                <a:extLst>
+                  <a:ext uri="{FF2B5EF4-FFF2-40B4-BE49-F238E27FC236}">
+                    <a16:creationId xmlns:a16="http://schemas.microsoft.com/office/drawing/2014/main" id="{367C5372-530C-87EF-8C11-DAE8E3414256}"/>
+                  </a:ext>
+                </a:extLst>
+              </p:cNvPr>
+              <p:cNvSpPr txBox="1"/>
+              <p:nvPr/>
+            </p:nvSpPr>
+            <p:spPr>
+              <a:xfrm>
+                <a:off x="2981969" y="4852118"/>
+                <a:ext cx="494030" cy="307777"/>
+              </a:xfrm>
+              <a:prstGeom prst="rect">
+                <a:avLst/>
+              </a:prstGeom>
+              <a:noFill/>
+            </p:spPr>
+            <p:txBody>
+              <a:bodyPr wrap="square">
+                <a:spAutoFit/>
+              </a:bodyPr>
+              <a:lstStyle/>
+              <a:p>
+                <a:pPr/>
+                <a14:m>
+                  <m:oMathPara xmlns:m="http://schemas.openxmlformats.org/officeDocument/2006/math">
+                    <m:oMathParaPr>
+                      <m:jc m:val="centerGroup"/>
+                    </m:oMathParaPr>
+                    <m:oMath xmlns:m="http://schemas.openxmlformats.org/officeDocument/2006/math">
+                      <m:r>
+                        <a:rPr lang="en-US" altLang="ko-KR" sz="1400" b="0" i="1" smtClean="0">
+                          <a:latin typeface="Cambria Math" panose="02040503050406030204" pitchFamily="18" charset="0"/>
+                        </a:rPr>
+                        <m:t>𝐾</m:t>
+                      </m:r>
+                    </m:oMath>
+                  </m:oMathPara>
+                </a14:m>
+                <a:endParaRPr lang="ko-KR" altLang="en-US" sz="1400" dirty="0"/>
+              </a:p>
+            </p:txBody>
+          </p:sp>
+        </mc:Choice>
+        <mc:Fallback>
+          <p:sp>
+            <p:nvSpPr>
+              <p:cNvPr id="59" name="TextBox 58">
+                <a:extLst>
+                  <a:ext uri="{FF2B5EF4-FFF2-40B4-BE49-F238E27FC236}">
+                    <a16:creationId xmlns:a16="http://schemas.microsoft.com/office/drawing/2014/main" id="{367C5372-530C-87EF-8C11-DAE8E3414256}"/>
+                  </a:ext>
+                </a:extLst>
+              </p:cNvPr>
+              <p:cNvSpPr txBox="1">
+                <a:spLocks noRot="1" noChangeAspect="1" noMove="1" noResize="1" noEditPoints="1" noAdjustHandles="1" noChangeArrowheads="1" noChangeShapeType="1" noTextEdit="1"/>
+              </p:cNvSpPr>
+              <p:nvPr/>
+            </p:nvSpPr>
+            <p:spPr>
+              <a:xfrm>
+                <a:off x="2981969" y="4852118"/>
+                <a:ext cx="494030" cy="307777"/>
+              </a:xfrm>
+              <a:prstGeom prst="rect">
+                <a:avLst/>
+              </a:prstGeom>
+              <a:blipFill>
+                <a:blip r:embed="rId5"/>
+                <a:stretch>
+                  <a:fillRect/>
+                </a:stretch>
+              </a:blipFill>
+            </p:spPr>
+            <p:txBody>
+              <a:bodyPr/>
+              <a:lstStyle/>
+              <a:p>
+                <a:r>
+                  <a:rPr lang="ko-KR" altLang="en-US">
+                    <a:noFill/>
+                  </a:rPr>
+                  <a:t> </a:t>
+                </a:r>
+              </a:p>
+            </p:txBody>
+          </p:sp>
+        </mc:Fallback>
+      </mc:AlternateContent>
+      <p:sp>
+        <p:nvSpPr>
+          <p:cNvPr id="62" name="TextBox 61">
+            <a:extLst>
+              <a:ext uri="{FF2B5EF4-FFF2-40B4-BE49-F238E27FC236}">
+                <a16:creationId xmlns:a16="http://schemas.microsoft.com/office/drawing/2014/main" id="{D0402B4C-9CC7-95FF-0A17-A819B919408D}"/>
+              </a:ext>
+            </a:extLst>
+          </p:cNvPr>
+          <p:cNvSpPr txBox="1"/>
+          <p:nvPr/>
+        </p:nvSpPr>
+        <p:spPr>
+          <a:xfrm>
+            <a:off x="1532829" y="1900214"/>
+            <a:ext cx="463187" cy="261610"/>
+          </a:xfrm>
+          <a:prstGeom prst="rect">
+            <a:avLst/>
+          </a:prstGeom>
+          <a:noFill/>
+        </p:spPr>
+        <p:txBody>
+          <a:bodyPr wrap="square">
+            <a:spAutoFit/>
+          </a:bodyPr>
+          <a:lstStyle/>
+          <a:p>
+            <a:r>
+              <a:rPr lang="ko-KR" altLang="en-US" sz="1100"/>
+              <a:t>비용</a:t>
+            </a:r>
+            <a:endParaRPr lang="ko-KR" altLang="en-US" sz="1100" dirty="0"/>
+          </a:p>
+        </p:txBody>
+      </p:sp>
+      <p:sp>
+        <p:nvSpPr>
+          <p:cNvPr id="63" name="직사각형 62">
+            <a:extLst>
+              <a:ext uri="{FF2B5EF4-FFF2-40B4-BE49-F238E27FC236}">
+                <a16:creationId xmlns:a16="http://schemas.microsoft.com/office/drawing/2014/main" id="{A3B28C0E-D511-2944-69DE-1C95CF189D21}"/>
+              </a:ext>
+            </a:extLst>
+          </p:cNvPr>
+          <p:cNvSpPr/>
+          <p:nvPr/>
+        </p:nvSpPr>
+        <p:spPr>
+          <a:xfrm>
+            <a:off x="1752299" y="2109892"/>
+            <a:ext cx="4809368" cy="45719"/>
+          </a:xfrm>
+          <a:prstGeom prst="rect">
+            <a:avLst/>
+          </a:prstGeom>
+          <a:solidFill>
+            <a:schemeClr val="bg1"/>
+          </a:solidFill>
+          <a:ln>
+            <a:noFill/>
+          </a:ln>
+        </p:spPr>
+        <p:style>
+          <a:lnRef idx="2">
+            <a:schemeClr val="accent1">
+              <a:shade val="15000"/>
+            </a:schemeClr>
+          </a:lnRef>
+          <a:fillRef idx="1">
+            <a:schemeClr val="accent1"/>
+          </a:fillRef>
+          <a:effectRef idx="0">
+            <a:schemeClr val="accent1"/>
+          </a:effectRef>
+          <a:fontRef idx="minor">
+            <a:schemeClr val="lt1"/>
+          </a:fontRef>
+        </p:style>
+        <p:txBody>
+          <a:bodyPr rtlCol="0" anchor="ctr"/>
+          <a:lstStyle/>
+          <a:p>
+            <a:pPr algn="ctr"/>
+            <a:endParaRPr lang="ko-KR" altLang="en-US"/>
+          </a:p>
+        </p:txBody>
+      </p:sp>
+      <p:sp>
+        <p:nvSpPr>
+          <p:cNvPr id="64" name="직사각형 63">
+            <a:extLst>
+              <a:ext uri="{FF2B5EF4-FFF2-40B4-BE49-F238E27FC236}">
+                <a16:creationId xmlns:a16="http://schemas.microsoft.com/office/drawing/2014/main" id="{F4C3DFE9-2403-4433-8E8B-3D72FD8B3860}"/>
+              </a:ext>
+            </a:extLst>
+          </p:cNvPr>
+          <p:cNvSpPr/>
+          <p:nvPr/>
+        </p:nvSpPr>
+        <p:spPr>
+          <a:xfrm rot="16200000">
+            <a:off x="3148423" y="3109581"/>
+            <a:ext cx="4809368" cy="45719"/>
+          </a:xfrm>
+          <a:prstGeom prst="rect">
+            <a:avLst/>
+          </a:prstGeom>
+          <a:solidFill>
+            <a:schemeClr val="bg1"/>
+          </a:solidFill>
+          <a:ln>
+            <a:noFill/>
+          </a:ln>
+        </p:spPr>
+        <p:style>
+          <a:lnRef idx="2">
+            <a:schemeClr val="accent1">
+              <a:shade val="15000"/>
+            </a:schemeClr>
+          </a:lnRef>
+          <a:fillRef idx="1">
+            <a:schemeClr val="accent1"/>
+          </a:fillRef>
+          <a:effectRef idx="0">
+            <a:schemeClr val="accent1"/>
+          </a:effectRef>
+          <a:fontRef idx="minor">
+            <a:schemeClr val="lt1"/>
+          </a:fontRef>
+        </p:style>
+        <p:txBody>
+          <a:bodyPr rtlCol="0" anchor="ctr"/>
+          <a:lstStyle/>
+          <a:p>
+            <a:pPr algn="ctr"/>
+            <a:endParaRPr lang="ko-KR" altLang="en-US"/>
+          </a:p>
+        </p:txBody>
+      </p:sp>
+      <p:sp>
+        <p:nvSpPr>
+          <p:cNvPr id="65" name="TextBox 64">
+            <a:extLst>
+              <a:ext uri="{FF2B5EF4-FFF2-40B4-BE49-F238E27FC236}">
+                <a16:creationId xmlns:a16="http://schemas.microsoft.com/office/drawing/2014/main" id="{E2F8D57F-7052-DB8A-65ED-64A3F72807B5}"/>
+              </a:ext>
+            </a:extLst>
+          </p:cNvPr>
+          <p:cNvSpPr txBox="1"/>
+          <p:nvPr/>
+        </p:nvSpPr>
+        <p:spPr>
+          <a:xfrm>
+            <a:off x="4184576" y="3008991"/>
+            <a:ext cx="1602845" cy="261610"/>
+          </a:xfrm>
+          <a:prstGeom prst="rect">
+            <a:avLst/>
+          </a:prstGeom>
+          <a:noFill/>
+        </p:spPr>
+        <p:txBody>
+          <a:bodyPr wrap="square">
+            <a:spAutoFit/>
+          </a:bodyPr>
+          <a:lstStyle/>
+          <a:p>
+            <a:r>
+              <a:rPr lang="ko-KR" altLang="en-US" sz="1100" dirty="0"/>
+              <a:t>첫째 </a:t>
+            </a:r>
+            <a:r>
+              <a:rPr lang="ko-KR" altLang="en-US" sz="1100"/>
+              <a:t>유형의 비용 곡선</a:t>
+            </a:r>
+            <a:endParaRPr lang="ko-KR" altLang="en-US" sz="1100" dirty="0"/>
+          </a:p>
+        </p:txBody>
+      </p:sp>
+      <p:sp>
+        <p:nvSpPr>
+          <p:cNvPr id="66" name="TextBox 65">
+            <a:extLst>
+              <a:ext uri="{FF2B5EF4-FFF2-40B4-BE49-F238E27FC236}">
+                <a16:creationId xmlns:a16="http://schemas.microsoft.com/office/drawing/2014/main" id="{417AD136-E223-EE29-5CBF-3417AC9145BB}"/>
+              </a:ext>
+            </a:extLst>
+          </p:cNvPr>
+          <p:cNvSpPr txBox="1"/>
+          <p:nvPr/>
+        </p:nvSpPr>
+        <p:spPr>
+          <a:xfrm>
+            <a:off x="4061069" y="4244040"/>
+            <a:ext cx="1602845" cy="261610"/>
+          </a:xfrm>
+          <a:prstGeom prst="rect">
+            <a:avLst/>
+          </a:prstGeom>
+          <a:noFill/>
+        </p:spPr>
+        <p:txBody>
+          <a:bodyPr wrap="square">
+            <a:spAutoFit/>
+          </a:bodyPr>
+          <a:lstStyle/>
+          <a:p>
+            <a:r>
+              <a:rPr lang="ko-KR" altLang="en-US" sz="1100" dirty="0"/>
+              <a:t>둘째 유형의 비용 곡선</a:t>
+            </a:r>
+          </a:p>
+        </p:txBody>
+      </p:sp>
+      <p:sp>
+        <p:nvSpPr>
+          <p:cNvPr id="67" name="TextBox 66">
+            <a:extLst>
+              <a:ext uri="{FF2B5EF4-FFF2-40B4-BE49-F238E27FC236}">
+                <a16:creationId xmlns:a16="http://schemas.microsoft.com/office/drawing/2014/main" id="{ED12ABE8-3B5C-2E60-1A5C-F5C1A2A3BD83}"/>
+              </a:ext>
+            </a:extLst>
+          </p:cNvPr>
+          <p:cNvSpPr txBox="1"/>
+          <p:nvPr/>
+        </p:nvSpPr>
+        <p:spPr>
+          <a:xfrm>
+            <a:off x="3622519" y="2147304"/>
+            <a:ext cx="674759" cy="261610"/>
+          </a:xfrm>
+          <a:prstGeom prst="rect">
+            <a:avLst/>
+          </a:prstGeom>
+          <a:noFill/>
+        </p:spPr>
+        <p:txBody>
+          <a:bodyPr wrap="square">
+            <a:spAutoFit/>
+          </a:bodyPr>
+          <a:lstStyle/>
+          <a:p>
+            <a:r>
+              <a:rPr lang="ko-KR" altLang="en-US" sz="1100"/>
+              <a:t>총비용</a:t>
+            </a:r>
+            <a:endParaRPr lang="ko-KR" altLang="en-US" sz="1100" dirty="0"/>
+          </a:p>
+        </p:txBody>
+      </p:sp>
+    </p:spTree>
+    <p:extLst>
+      <p:ext uri="{BB962C8B-B14F-4D97-AF65-F5344CB8AC3E}">
+        <p14:creationId xmlns:p14="http://schemas.microsoft.com/office/powerpoint/2010/main" val="4021531449"/>
       </p:ext>
     </p:extLst>
   </p:cSld>

--- a/재정학/01_Lectures/재정학 원본 그래프.pptx
+++ b/재정학/01_Lectures/재정학 원본 그래프.pptx
@@ -5,7 +5,7 @@
     <p:sldMasterId id="2147483648" r:id="rId1"/>
   </p:sldMasterIdLst>
   <p:notesMasterIdLst>
-    <p:notesMasterId r:id="rId15"/>
+    <p:notesMasterId r:id="rId16"/>
   </p:notesMasterIdLst>
   <p:sldIdLst>
     <p:sldId id="257" r:id="rId2"/>
@@ -21,6 +21,7 @@
     <p:sldId id="268" r:id="rId12"/>
     <p:sldId id="269" r:id="rId13"/>
     <p:sldId id="270" r:id="rId14"/>
+    <p:sldId id="271" r:id="rId15"/>
   </p:sldIdLst>
   <p:sldSz cx="12192000" cy="6858000"/>
   <p:notesSz cx="6858000" cy="9144000"/>
@@ -220,7 +221,7 @@
           <a:p>
             <a:fld id="{E491D89A-D18F-4C97-B83B-0B7859E511B8}" type="datetimeFigureOut">
               <a:rPr lang="ko-KR" altLang="en-US" smtClean="0"/>
-              <a:t>2026-02-20</a:t>
+              <a:t>2026-03-05</a:t>
             </a:fld>
             <a:endParaRPr lang="ko-KR" altLang="en-US"/>
           </a:p>
@@ -955,7 +956,7 @@
           <a:p>
             <a:fld id="{A045B708-0C1F-467E-8BD3-0C4EB3C5FB22}" type="datetimeFigureOut">
               <a:rPr lang="ko-KR" altLang="en-US" smtClean="0"/>
-              <a:t>2026-02-20</a:t>
+              <a:t>2026-03-05</a:t>
             </a:fld>
             <a:endParaRPr lang="ko-KR" altLang="en-US"/>
           </a:p>
@@ -1153,7 +1154,7 @@
           <a:p>
             <a:fld id="{A045B708-0C1F-467E-8BD3-0C4EB3C5FB22}" type="datetimeFigureOut">
               <a:rPr lang="ko-KR" altLang="en-US" smtClean="0"/>
-              <a:t>2026-02-20</a:t>
+              <a:t>2026-03-05</a:t>
             </a:fld>
             <a:endParaRPr lang="ko-KR" altLang="en-US"/>
           </a:p>
@@ -1361,7 +1362,7 @@
           <a:p>
             <a:fld id="{A045B708-0C1F-467E-8BD3-0C4EB3C5FB22}" type="datetimeFigureOut">
               <a:rPr lang="ko-KR" altLang="en-US" smtClean="0"/>
-              <a:t>2026-02-20</a:t>
+              <a:t>2026-03-05</a:t>
             </a:fld>
             <a:endParaRPr lang="ko-KR" altLang="en-US"/>
           </a:p>
@@ -1559,7 +1560,7 @@
           <a:p>
             <a:fld id="{A045B708-0C1F-467E-8BD3-0C4EB3C5FB22}" type="datetimeFigureOut">
               <a:rPr lang="ko-KR" altLang="en-US" smtClean="0"/>
-              <a:t>2026-02-20</a:t>
+              <a:t>2026-03-05</a:t>
             </a:fld>
             <a:endParaRPr lang="ko-KR" altLang="en-US"/>
           </a:p>
@@ -1834,7 +1835,7 @@
           <a:p>
             <a:fld id="{A045B708-0C1F-467E-8BD3-0C4EB3C5FB22}" type="datetimeFigureOut">
               <a:rPr lang="ko-KR" altLang="en-US" smtClean="0"/>
-              <a:t>2026-02-20</a:t>
+              <a:t>2026-03-05</a:t>
             </a:fld>
             <a:endParaRPr lang="ko-KR" altLang="en-US"/>
           </a:p>
@@ -2099,7 +2100,7 @@
           <a:p>
             <a:fld id="{A045B708-0C1F-467E-8BD3-0C4EB3C5FB22}" type="datetimeFigureOut">
               <a:rPr lang="ko-KR" altLang="en-US" smtClean="0"/>
-              <a:t>2026-02-20</a:t>
+              <a:t>2026-03-05</a:t>
             </a:fld>
             <a:endParaRPr lang="ko-KR" altLang="en-US"/>
           </a:p>
@@ -2511,7 +2512,7 @@
           <a:p>
             <a:fld id="{A045B708-0C1F-467E-8BD3-0C4EB3C5FB22}" type="datetimeFigureOut">
               <a:rPr lang="ko-KR" altLang="en-US" smtClean="0"/>
-              <a:t>2026-02-20</a:t>
+              <a:t>2026-03-05</a:t>
             </a:fld>
             <a:endParaRPr lang="ko-KR" altLang="en-US"/>
           </a:p>
@@ -2652,7 +2653,7 @@
           <a:p>
             <a:fld id="{A045B708-0C1F-467E-8BD3-0C4EB3C5FB22}" type="datetimeFigureOut">
               <a:rPr lang="ko-KR" altLang="en-US" smtClean="0"/>
-              <a:t>2026-02-20</a:t>
+              <a:t>2026-03-05</a:t>
             </a:fld>
             <a:endParaRPr lang="ko-KR" altLang="en-US"/>
           </a:p>
@@ -2765,7 +2766,7 @@
           <a:p>
             <a:fld id="{A045B708-0C1F-467E-8BD3-0C4EB3C5FB22}" type="datetimeFigureOut">
               <a:rPr lang="ko-KR" altLang="en-US" smtClean="0"/>
-              <a:t>2026-02-20</a:t>
+              <a:t>2026-03-05</a:t>
             </a:fld>
             <a:endParaRPr lang="ko-KR" altLang="en-US"/>
           </a:p>
@@ -3076,7 +3077,7 @@
           <a:p>
             <a:fld id="{A045B708-0C1F-467E-8BD3-0C4EB3C5FB22}" type="datetimeFigureOut">
               <a:rPr lang="ko-KR" altLang="en-US" smtClean="0"/>
-              <a:t>2026-02-20</a:t>
+              <a:t>2026-03-05</a:t>
             </a:fld>
             <a:endParaRPr lang="ko-KR" altLang="en-US"/>
           </a:p>
@@ -3364,7 +3365,7 @@
           <a:p>
             <a:fld id="{A045B708-0C1F-467E-8BD3-0C4EB3C5FB22}" type="datetimeFigureOut">
               <a:rPr lang="ko-KR" altLang="en-US" smtClean="0"/>
-              <a:t>2026-02-20</a:t>
+              <a:t>2026-03-05</a:t>
             </a:fld>
             <a:endParaRPr lang="ko-KR" altLang="en-US"/>
           </a:p>
@@ -3605,7 +3606,7 @@
           <a:p>
             <a:fld id="{A045B708-0C1F-467E-8BD3-0C4EB3C5FB22}" type="datetimeFigureOut">
               <a:rPr lang="ko-KR" altLang="en-US" smtClean="0"/>
-              <a:t>2026-02-20</a:t>
+              <a:t>2026-03-05</a:t>
             </a:fld>
             <a:endParaRPr lang="ko-KR" altLang="en-US"/>
           </a:p>
@@ -11374,8 +11375,8 @@
           </a:p>
         </p:txBody>
       </p:sp>
-      <mc:AlternateContent xmlns:mc="http://schemas.openxmlformats.org/markup-compatibility/2006">
-        <mc:Choice xmlns:a14="http://schemas.microsoft.com/office/drawing/2010/main" Requires="a14">
+      <mc:AlternateContent xmlns:mc="http://schemas.openxmlformats.org/markup-compatibility/2006" xmlns:a14="http://schemas.microsoft.com/office/drawing/2010/main">
+        <mc:Choice Requires="a14">
           <p:sp>
             <p:nvSpPr>
               <p:cNvPr id="50" name="TextBox 49">
@@ -11425,7 +11426,7 @@
             </p:txBody>
           </p:sp>
         </mc:Choice>
-        <mc:Fallback>
+        <mc:Fallback xmlns="">
           <p:sp>
             <p:nvSpPr>
               <p:cNvPr id="50" name="TextBox 49">
@@ -11522,8 +11523,8 @@
           </a:p>
         </p:txBody>
       </p:sp>
-      <mc:AlternateContent xmlns:mc="http://schemas.openxmlformats.org/markup-compatibility/2006">
-        <mc:Choice xmlns:a14="http://schemas.microsoft.com/office/drawing/2010/main" Requires="a14">
+      <mc:AlternateContent xmlns:mc="http://schemas.openxmlformats.org/markup-compatibility/2006" xmlns:a14="http://schemas.microsoft.com/office/drawing/2010/main">
+        <mc:Choice Requires="a14">
           <p:sp>
             <p:nvSpPr>
               <p:cNvPr id="52" name="TextBox 51">
@@ -11592,7 +11593,7 @@
             </p:txBody>
           </p:sp>
         </mc:Choice>
-        <mc:Fallback>
+        <mc:Fallback xmlns="">
           <p:sp>
             <p:nvSpPr>
               <p:cNvPr id="52" name="TextBox 51">
@@ -11689,8 +11690,8 @@
           </a:p>
         </p:txBody>
       </p:sp>
-      <mc:AlternateContent xmlns:mc="http://schemas.openxmlformats.org/markup-compatibility/2006">
-        <mc:Choice xmlns:a14="http://schemas.microsoft.com/office/drawing/2010/main" Requires="a14">
+      <mc:AlternateContent xmlns:mc="http://schemas.openxmlformats.org/markup-compatibility/2006" xmlns:a14="http://schemas.microsoft.com/office/drawing/2010/main">
+        <mc:Choice Requires="a14">
           <p:sp>
             <p:nvSpPr>
               <p:cNvPr id="56" name="TextBox 55">
@@ -11759,7 +11760,7 @@
             </p:txBody>
           </p:sp>
         </mc:Choice>
-        <mc:Fallback>
+        <mc:Fallback xmlns="">
           <p:sp>
             <p:nvSpPr>
               <p:cNvPr id="56" name="TextBox 55">
@@ -11804,8 +11805,8 @@
           </p:sp>
         </mc:Fallback>
       </mc:AlternateContent>
-      <mc:AlternateContent xmlns:mc="http://schemas.openxmlformats.org/markup-compatibility/2006">
-        <mc:Choice xmlns:a14="http://schemas.microsoft.com/office/drawing/2010/main" Requires="a14">
+      <mc:AlternateContent xmlns:mc="http://schemas.openxmlformats.org/markup-compatibility/2006" xmlns:a14="http://schemas.microsoft.com/office/drawing/2010/main">
+        <mc:Choice Requires="a14">
           <p:sp>
             <p:nvSpPr>
               <p:cNvPr id="45" name="TextBox 44">
@@ -11874,7 +11875,7 @@
             </p:txBody>
           </p:sp>
         </mc:Choice>
-        <mc:Fallback>
+        <mc:Fallback xmlns="">
           <p:sp>
             <p:nvSpPr>
               <p:cNvPr id="45" name="TextBox 44">
@@ -12161,8 +12162,8 @@
           </a:p>
         </p:txBody>
       </p:sp>
-      <mc:AlternateContent xmlns:mc="http://schemas.openxmlformats.org/markup-compatibility/2006">
-        <mc:Choice xmlns:a14="http://schemas.microsoft.com/office/drawing/2010/main" Requires="a14">
+      <mc:AlternateContent xmlns:mc="http://schemas.openxmlformats.org/markup-compatibility/2006" xmlns:a14="http://schemas.microsoft.com/office/drawing/2010/main">
+        <mc:Choice Requires="a14">
           <p:sp>
             <p:nvSpPr>
               <p:cNvPr id="55" name="TextBox 54">
@@ -12212,7 +12213,7 @@
             </p:txBody>
           </p:sp>
         </mc:Choice>
-        <mc:Fallback>
+        <mc:Fallback xmlns="">
           <p:sp>
             <p:nvSpPr>
               <p:cNvPr id="55" name="TextBox 54">
@@ -12309,8 +12310,8 @@
           </a:p>
         </p:txBody>
       </p:sp>
-      <mc:AlternateContent xmlns:mc="http://schemas.openxmlformats.org/markup-compatibility/2006">
-        <mc:Choice xmlns:a14="http://schemas.microsoft.com/office/drawing/2010/main" Requires="a14">
+      <mc:AlternateContent xmlns:mc="http://schemas.openxmlformats.org/markup-compatibility/2006" xmlns:a14="http://schemas.microsoft.com/office/drawing/2010/main">
+        <mc:Choice Requires="a14">
           <p:sp>
             <p:nvSpPr>
               <p:cNvPr id="59" name="TextBox 58">
@@ -12379,7 +12380,7 @@
             </p:txBody>
           </p:sp>
         </mc:Choice>
-        <mc:Fallback>
+        <mc:Fallback xmlns="">
           <p:sp>
             <p:nvSpPr>
               <p:cNvPr id="59" name="TextBox 58">
@@ -12476,8 +12477,8 @@
           </a:p>
         </p:txBody>
       </p:sp>
-      <mc:AlternateContent xmlns:mc="http://schemas.openxmlformats.org/markup-compatibility/2006">
-        <mc:Choice xmlns:a14="http://schemas.microsoft.com/office/drawing/2010/main" Requires="a14">
+      <mc:AlternateContent xmlns:mc="http://schemas.openxmlformats.org/markup-compatibility/2006" xmlns:a14="http://schemas.microsoft.com/office/drawing/2010/main">
+        <mc:Choice Requires="a14">
           <p:sp>
             <p:nvSpPr>
               <p:cNvPr id="61" name="TextBox 60">
@@ -12546,7 +12547,7 @@
             </p:txBody>
           </p:sp>
         </mc:Choice>
-        <mc:Fallback>
+        <mc:Fallback xmlns="">
           <p:sp>
             <p:nvSpPr>
               <p:cNvPr id="61" name="TextBox 60">
@@ -12591,8 +12592,8 @@
           </p:sp>
         </mc:Fallback>
       </mc:AlternateContent>
-      <mc:AlternateContent xmlns:mc="http://schemas.openxmlformats.org/markup-compatibility/2006">
-        <mc:Choice xmlns:a14="http://schemas.microsoft.com/office/drawing/2010/main" Requires="a14">
+      <mc:AlternateContent xmlns:mc="http://schemas.openxmlformats.org/markup-compatibility/2006" xmlns:a14="http://schemas.microsoft.com/office/drawing/2010/main">
+        <mc:Choice Requires="a14">
           <p:sp>
             <p:nvSpPr>
               <p:cNvPr id="65" name="TextBox 64">
@@ -12621,7 +12622,6 @@
               </a:bodyPr>
               <a:lstStyle/>
               <a:p>
-                <a:pPr/>
                 <a14:m>
                   <m:oMath xmlns:m="http://schemas.openxmlformats.org/officeDocument/2006/math">
                     <m:r>
@@ -12653,7 +12653,7 @@
             </p:txBody>
           </p:sp>
         </mc:Choice>
-        <mc:Fallback>
+        <mc:Fallback xmlns="">
           <p:sp>
             <p:nvSpPr>
               <p:cNvPr id="65" name="TextBox 64">
@@ -12897,8 +12897,8 @@
           </a:p>
         </p:txBody>
       </p:sp>
-      <mc:AlternateContent xmlns:mc="http://schemas.openxmlformats.org/markup-compatibility/2006">
-        <mc:Choice xmlns:a14="http://schemas.microsoft.com/office/drawing/2010/main" Requires="a14">
+      <mc:AlternateContent xmlns:mc="http://schemas.openxmlformats.org/markup-compatibility/2006" xmlns:a14="http://schemas.microsoft.com/office/drawing/2010/main">
+        <mc:Choice Requires="a14">
           <p:sp>
             <p:nvSpPr>
               <p:cNvPr id="78" name="TextBox 77">
@@ -12967,7 +12967,7 @@
             </p:txBody>
           </p:sp>
         </mc:Choice>
-        <mc:Fallback>
+        <mc:Fallback xmlns="">
           <p:sp>
             <p:nvSpPr>
               <p:cNvPr id="78" name="TextBox 77">
@@ -13012,8 +13012,8 @@
           </p:sp>
         </mc:Fallback>
       </mc:AlternateContent>
-      <mc:AlternateContent xmlns:mc="http://schemas.openxmlformats.org/markup-compatibility/2006">
-        <mc:Choice xmlns:a14="http://schemas.microsoft.com/office/drawing/2010/main" Requires="a14">
+      <mc:AlternateContent xmlns:mc="http://schemas.openxmlformats.org/markup-compatibility/2006" xmlns:a14="http://schemas.microsoft.com/office/drawing/2010/main">
+        <mc:Choice Requires="a14">
           <p:sp>
             <p:nvSpPr>
               <p:cNvPr id="81" name="TextBox 80">
@@ -13082,7 +13082,7 @@
             </p:txBody>
           </p:sp>
         </mc:Choice>
-        <mc:Fallback>
+        <mc:Fallback xmlns="">
           <p:sp>
             <p:nvSpPr>
               <p:cNvPr id="81" name="TextBox 80">
@@ -13179,8 +13179,8 @@
           </a:p>
         </p:txBody>
       </p:sp>
-      <mc:AlternateContent xmlns:mc="http://schemas.openxmlformats.org/markup-compatibility/2006">
-        <mc:Choice xmlns:a14="http://schemas.microsoft.com/office/drawing/2010/main" Requires="a14">
+      <mc:AlternateContent xmlns:mc="http://schemas.openxmlformats.org/markup-compatibility/2006" xmlns:a14="http://schemas.microsoft.com/office/drawing/2010/main">
+        <mc:Choice Requires="a14">
           <p:sp>
             <p:nvSpPr>
               <p:cNvPr id="85" name="TextBox 84">
@@ -13238,13 +13238,12 @@
                 <a:endParaRPr lang="ko-KR" altLang="en-US" sz="1100" dirty="0"/>
               </a:p>
               <a:p>
-                <a:pPr/>
                 <a:endParaRPr lang="ko-KR" altLang="en-US" sz="1100" dirty="0"/>
               </a:p>
             </p:txBody>
           </p:sp>
         </mc:Choice>
-        <mc:Fallback>
+        <mc:Fallback xmlns="">
           <p:sp>
             <p:nvSpPr>
               <p:cNvPr id="85" name="TextBox 84">
@@ -13289,8 +13288,8 @@
           </p:sp>
         </mc:Fallback>
       </mc:AlternateContent>
-      <mc:AlternateContent xmlns:mc="http://schemas.openxmlformats.org/markup-compatibility/2006">
-        <mc:Choice xmlns:a14="http://schemas.microsoft.com/office/drawing/2010/main" Requires="a14">
+      <mc:AlternateContent xmlns:mc="http://schemas.openxmlformats.org/markup-compatibility/2006" xmlns:a14="http://schemas.microsoft.com/office/drawing/2010/main">
+        <mc:Choice Requires="a14">
           <p:sp>
             <p:nvSpPr>
               <p:cNvPr id="86" name="TextBox 85">
@@ -13348,13 +13347,12 @@
                 <a:endParaRPr lang="ko-KR" altLang="en-US" sz="1100" dirty="0"/>
               </a:p>
               <a:p>
-                <a:pPr/>
                 <a:endParaRPr lang="ko-KR" altLang="en-US" sz="1100" dirty="0"/>
               </a:p>
             </p:txBody>
           </p:sp>
         </mc:Choice>
-        <mc:Fallback>
+        <mc:Fallback xmlns="">
           <p:sp>
             <p:nvSpPr>
               <p:cNvPr id="86" name="TextBox 85">
@@ -13399,8 +13397,8 @@
           </p:sp>
         </mc:Fallback>
       </mc:AlternateContent>
-      <mc:AlternateContent xmlns:mc="http://schemas.openxmlformats.org/markup-compatibility/2006">
-        <mc:Choice xmlns:a14="http://schemas.microsoft.com/office/drawing/2010/main" Requires="a14">
+      <mc:AlternateContent xmlns:mc="http://schemas.openxmlformats.org/markup-compatibility/2006" xmlns:a14="http://schemas.microsoft.com/office/drawing/2010/main">
+        <mc:Choice Requires="a14">
           <p:sp>
             <p:nvSpPr>
               <p:cNvPr id="87" name="TextBox 86">
@@ -13469,7 +13467,7 @@
             </p:txBody>
           </p:sp>
         </mc:Choice>
-        <mc:Fallback>
+        <mc:Fallback xmlns="">
           <p:sp>
             <p:nvSpPr>
               <p:cNvPr id="87" name="TextBox 86">
@@ -13722,8 +13720,8 @@
           </a:p>
         </p:txBody>
       </p:sp>
-      <mc:AlternateContent xmlns:mc="http://schemas.openxmlformats.org/markup-compatibility/2006">
-        <mc:Choice xmlns:a14="http://schemas.microsoft.com/office/drawing/2010/main" Requires="a14">
+      <mc:AlternateContent xmlns:mc="http://schemas.openxmlformats.org/markup-compatibility/2006" xmlns:a14="http://schemas.microsoft.com/office/drawing/2010/main">
+        <mc:Choice Requires="a14">
           <p:sp>
             <p:nvSpPr>
               <p:cNvPr id="80" name="TextBox 79">
@@ -13792,7 +13790,7 @@
             </p:txBody>
           </p:sp>
         </mc:Choice>
-        <mc:Fallback>
+        <mc:Fallback xmlns="">
           <p:sp>
             <p:nvSpPr>
               <p:cNvPr id="80" name="TextBox 79">
@@ -13964,8 +13962,8 @@
           </a:fontRef>
         </p:style>
       </p:cxnSp>
-      <mc:AlternateContent xmlns:mc="http://schemas.openxmlformats.org/markup-compatibility/2006">
-        <mc:Choice xmlns:a14="http://schemas.microsoft.com/office/drawing/2010/main" Requires="a14">
+      <mc:AlternateContent xmlns:mc="http://schemas.openxmlformats.org/markup-compatibility/2006" xmlns:a14="http://schemas.microsoft.com/office/drawing/2010/main">
+        <mc:Choice Requires="a14">
           <p:sp>
             <p:nvSpPr>
               <p:cNvPr id="119" name="TextBox 118">
@@ -14015,7 +14013,7 @@
             </p:txBody>
           </p:sp>
         </mc:Choice>
-        <mc:Fallback>
+        <mc:Fallback xmlns="">
           <p:sp>
             <p:nvSpPr>
               <p:cNvPr id="119" name="TextBox 118">
@@ -14112,8 +14110,8 @@
           </a:p>
         </p:txBody>
       </p:sp>
-      <mc:AlternateContent xmlns:mc="http://schemas.openxmlformats.org/markup-compatibility/2006">
-        <mc:Choice xmlns:a14="http://schemas.microsoft.com/office/drawing/2010/main" Requires="a14">
+      <mc:AlternateContent xmlns:mc="http://schemas.openxmlformats.org/markup-compatibility/2006" xmlns:a14="http://schemas.microsoft.com/office/drawing/2010/main">
+        <mc:Choice Requires="a14">
           <p:sp>
             <p:nvSpPr>
               <p:cNvPr id="122" name="TextBox 121">
@@ -14142,6 +14140,7 @@
               </a:bodyPr>
               <a:lstStyle/>
               <a:p>
+                <a:pPr/>
                 <a14:m>
                   <m:oMathPara xmlns:m="http://schemas.openxmlformats.org/officeDocument/2006/math">
                     <m:oMathParaPr>
@@ -14181,7 +14180,7 @@
             </p:txBody>
           </p:sp>
         </mc:Choice>
-        <mc:Fallback>
+        <mc:Fallback xmlns="">
           <p:sp>
             <p:nvSpPr>
               <p:cNvPr id="122" name="TextBox 121">
@@ -14362,8 +14361,8 @@
           </a:p>
         </p:txBody>
       </p:sp>
-      <mc:AlternateContent xmlns:mc="http://schemas.openxmlformats.org/markup-compatibility/2006">
-        <mc:Choice xmlns:a14="http://schemas.microsoft.com/office/drawing/2010/main" Requires="a14">
+      <mc:AlternateContent xmlns:mc="http://schemas.openxmlformats.org/markup-compatibility/2006" xmlns:a14="http://schemas.microsoft.com/office/drawing/2010/main">
+        <mc:Choice Requires="a14">
           <p:sp>
             <p:nvSpPr>
               <p:cNvPr id="6" name="TextBox 5">
@@ -14413,7 +14412,7 @@
             </p:txBody>
           </p:sp>
         </mc:Choice>
-        <mc:Fallback>
+        <mc:Fallback xmlns="">
           <p:sp>
             <p:nvSpPr>
               <p:cNvPr id="6" name="TextBox 5">
@@ -14510,8 +14509,8 @@
           </a:p>
         </p:txBody>
       </p:sp>
-      <mc:AlternateContent xmlns:mc="http://schemas.openxmlformats.org/markup-compatibility/2006">
-        <mc:Choice xmlns:a14="http://schemas.microsoft.com/office/drawing/2010/main" Requires="a14">
+      <mc:AlternateContent xmlns:mc="http://schemas.openxmlformats.org/markup-compatibility/2006" xmlns:a14="http://schemas.microsoft.com/office/drawing/2010/main">
+        <mc:Choice Requires="a14">
           <p:sp>
             <p:nvSpPr>
               <p:cNvPr id="8" name="TextBox 7">
@@ -14580,7 +14579,7 @@
             </p:txBody>
           </p:sp>
         </mc:Choice>
-        <mc:Fallback>
+        <mc:Fallback xmlns="">
           <p:sp>
             <p:nvSpPr>
               <p:cNvPr id="8" name="TextBox 7">
@@ -14785,8 +14784,8 @@
           </a:p>
         </p:txBody>
       </p:sp>
-      <mc:AlternateContent xmlns:mc="http://schemas.openxmlformats.org/markup-compatibility/2006">
-        <mc:Choice xmlns:a14="http://schemas.microsoft.com/office/drawing/2010/main" Requires="a14">
+      <mc:AlternateContent xmlns:mc="http://schemas.openxmlformats.org/markup-compatibility/2006" xmlns:a14="http://schemas.microsoft.com/office/drawing/2010/main">
+        <mc:Choice Requires="a14">
           <p:sp>
             <p:nvSpPr>
               <p:cNvPr id="13" name="TextBox 12">
@@ -14855,7 +14854,7 @@
             </p:txBody>
           </p:sp>
         </mc:Choice>
-        <mc:Fallback>
+        <mc:Fallback xmlns="">
           <p:sp>
             <p:nvSpPr>
               <p:cNvPr id="13" name="TextBox 12">
@@ -15213,8 +15212,8 @@
           </a:fontRef>
         </p:style>
       </p:cxnSp>
-      <mc:AlternateContent xmlns:mc="http://schemas.openxmlformats.org/markup-compatibility/2006">
-        <mc:Choice xmlns:a14="http://schemas.microsoft.com/office/drawing/2010/main" Requires="a14">
+      <mc:AlternateContent xmlns:mc="http://schemas.openxmlformats.org/markup-compatibility/2006" xmlns:a14="http://schemas.microsoft.com/office/drawing/2010/main">
+        <mc:Choice Requires="a14">
           <p:sp>
             <p:nvSpPr>
               <p:cNvPr id="21" name="TextBox 20">
@@ -15243,6 +15242,7 @@
               </a:bodyPr>
               <a:lstStyle/>
               <a:p>
+                <a:pPr/>
                 <a14:m>
                   <m:oMathPara xmlns:m="http://schemas.openxmlformats.org/officeDocument/2006/math">
                     <m:oMathParaPr>
@@ -15290,7 +15290,7 @@
             </p:txBody>
           </p:sp>
         </mc:Choice>
-        <mc:Fallback>
+        <mc:Fallback xmlns="">
           <p:sp>
             <p:nvSpPr>
               <p:cNvPr id="21" name="TextBox 20">
@@ -15335,8 +15335,8 @@
           </p:sp>
         </mc:Fallback>
       </mc:AlternateContent>
-      <mc:AlternateContent xmlns:mc="http://schemas.openxmlformats.org/markup-compatibility/2006">
-        <mc:Choice xmlns:a14="http://schemas.microsoft.com/office/drawing/2010/main" Requires="a14">
+      <mc:AlternateContent xmlns:mc="http://schemas.openxmlformats.org/markup-compatibility/2006" xmlns:a14="http://schemas.microsoft.com/office/drawing/2010/main">
+        <mc:Choice Requires="a14">
           <p:sp>
             <p:nvSpPr>
               <p:cNvPr id="22" name="TextBox 21">
@@ -15365,6 +15365,7 @@
               </a:bodyPr>
               <a:lstStyle/>
               <a:p>
+                <a:pPr/>
                 <a14:m>
                   <m:oMathPara xmlns:m="http://schemas.openxmlformats.org/officeDocument/2006/math">
                     <m:oMathParaPr>
@@ -15412,7 +15413,7 @@
             </p:txBody>
           </p:sp>
         </mc:Choice>
-        <mc:Fallback>
+        <mc:Fallback xmlns="">
           <p:sp>
             <p:nvSpPr>
               <p:cNvPr id="22" name="TextBox 21">
@@ -15457,8 +15458,8 @@
           </p:sp>
         </mc:Fallback>
       </mc:AlternateContent>
-      <mc:AlternateContent xmlns:mc="http://schemas.openxmlformats.org/markup-compatibility/2006">
-        <mc:Choice xmlns:a14="http://schemas.microsoft.com/office/drawing/2010/main" Requires="a14">
+      <mc:AlternateContent xmlns:mc="http://schemas.openxmlformats.org/markup-compatibility/2006" xmlns:a14="http://schemas.microsoft.com/office/drawing/2010/main">
+        <mc:Choice Requires="a14">
           <p:sp>
             <p:nvSpPr>
               <p:cNvPr id="23" name="TextBox 22">
@@ -15508,7 +15509,7 @@
             </p:txBody>
           </p:sp>
         </mc:Choice>
-        <mc:Fallback>
+        <mc:Fallback xmlns="">
           <p:sp>
             <p:nvSpPr>
               <p:cNvPr id="23" name="TextBox 22">
@@ -15557,6 +15558,998 @@
     <p:extLst>
       <p:ext uri="{BB962C8B-B14F-4D97-AF65-F5344CB8AC3E}">
         <p14:creationId xmlns:p14="http://schemas.microsoft.com/office/powerpoint/2010/main" val="1082648392"/>
+      </p:ext>
+    </p:extLst>
+  </p:cSld>
+  <p:clrMapOvr>
+    <a:masterClrMapping/>
+  </p:clrMapOvr>
+</p:sld>
+</file>
+
+<file path=ppt/slides/slide14.xml><?xml version="1.0" encoding="utf-8"?>
+<p:sld xmlns:a="http://schemas.openxmlformats.org/drawingml/2006/main" xmlns:r="http://schemas.openxmlformats.org/officeDocument/2006/relationships" xmlns:p="http://schemas.openxmlformats.org/presentationml/2006/main">
+  <p:cSld>
+    <p:spTree>
+      <p:nvGrpSpPr>
+        <p:cNvPr id="1" name="">
+          <a:extLst>
+            <a:ext uri="{FF2B5EF4-FFF2-40B4-BE49-F238E27FC236}">
+              <a16:creationId xmlns:a16="http://schemas.microsoft.com/office/drawing/2014/main" id="{970908DD-658C-4A66-F15E-D04FD7CE5186}"/>
+            </a:ext>
+          </a:extLst>
+        </p:cNvPr>
+        <p:cNvGrpSpPr/>
+        <p:nvPr/>
+      </p:nvGrpSpPr>
+      <p:grpSpPr>
+        <a:xfrm>
+          <a:off x="0" y="0"/>
+          <a:ext cx="0" cy="0"/>
+          <a:chOff x="0" y="0"/>
+          <a:chExt cx="0" cy="0"/>
+        </a:xfrm>
+      </p:grpSpPr>
+      <p:sp>
+        <p:nvSpPr>
+          <p:cNvPr id="12" name="TextBox 11">
+            <a:extLst>
+              <a:ext uri="{FF2B5EF4-FFF2-40B4-BE49-F238E27FC236}">
+                <a16:creationId xmlns:a16="http://schemas.microsoft.com/office/drawing/2014/main" id="{2DB5BCEA-3C5B-1D94-B804-3B94E99F295B}"/>
+              </a:ext>
+            </a:extLst>
+          </p:cNvPr>
+          <p:cNvSpPr txBox="1"/>
+          <p:nvPr/>
+        </p:nvSpPr>
+        <p:spPr>
+          <a:xfrm>
+            <a:off x="90203" y="207594"/>
+            <a:ext cx="5408897" cy="338554"/>
+          </a:xfrm>
+          <a:prstGeom prst="rect">
+            <a:avLst/>
+          </a:prstGeom>
+          <a:noFill/>
+        </p:spPr>
+        <p:txBody>
+          <a:bodyPr wrap="square">
+            <a:spAutoFit/>
+          </a:bodyPr>
+          <a:lstStyle/>
+          <a:p>
+            <a:pPr algn="ctr"/>
+            <a:r>
+              <a:rPr lang="en-US" altLang="ko-KR" sz="1600" dirty="0"/>
+              <a:t>167</a:t>
+            </a:r>
+            <a:r>
+              <a:rPr lang="ko-KR" altLang="en-US" sz="1600" dirty="0"/>
+              <a:t>페이지</a:t>
+            </a:r>
+            <a:r>
+              <a:rPr lang="en-US" altLang="ko-KR" sz="1600" dirty="0"/>
+              <a:t>, </a:t>
+            </a:r>
+            <a:r>
+              <a:rPr lang="ko-KR" altLang="en-US" sz="1600" dirty="0"/>
+              <a:t>그림 </a:t>
+            </a:r>
+            <a:r>
+              <a:rPr lang="en-US" altLang="ko-KR" sz="1600" dirty="0"/>
+              <a:t>6-1 </a:t>
+            </a:r>
+            <a:r>
+              <a:rPr lang="ko-KR" altLang="en-US" sz="1600" dirty="0"/>
+              <a:t> 외부성이 존재할 때의 최적배분</a:t>
+            </a:r>
+          </a:p>
+        </p:txBody>
+      </p:sp>
+      <p:sp>
+        <p:nvSpPr>
+          <p:cNvPr id="34" name="직사각형 33">
+            <a:extLst>
+              <a:ext uri="{FF2B5EF4-FFF2-40B4-BE49-F238E27FC236}">
+                <a16:creationId xmlns:a16="http://schemas.microsoft.com/office/drawing/2014/main" id="{29D7560B-1EEA-44E9-D6B9-771F8F7E07B5}"/>
+              </a:ext>
+            </a:extLst>
+          </p:cNvPr>
+          <p:cNvSpPr/>
+          <p:nvPr/>
+        </p:nvSpPr>
+        <p:spPr>
+          <a:xfrm>
+            <a:off x="1752299" y="2109892"/>
+            <a:ext cx="3792342" cy="2796116"/>
+          </a:xfrm>
+          <a:prstGeom prst="rect">
+            <a:avLst/>
+          </a:prstGeom>
+          <a:solidFill>
+            <a:schemeClr val="bg1"/>
+          </a:solidFill>
+          <a:ln w="6350">
+            <a:solidFill>
+              <a:schemeClr val="tx1"/>
+            </a:solidFill>
+          </a:ln>
+        </p:spPr>
+        <p:style>
+          <a:lnRef idx="2">
+            <a:schemeClr val="accent1">
+              <a:shade val="15000"/>
+            </a:schemeClr>
+          </a:lnRef>
+          <a:fillRef idx="1">
+            <a:schemeClr val="accent1"/>
+          </a:fillRef>
+          <a:effectRef idx="0">
+            <a:schemeClr val="accent1"/>
+          </a:effectRef>
+          <a:fontRef idx="minor">
+            <a:schemeClr val="lt1"/>
+          </a:fontRef>
+        </p:style>
+        <p:txBody>
+          <a:bodyPr rtlCol="0" anchor="ctr"/>
+          <a:lstStyle/>
+          <a:p>
+            <a:pPr algn="ctr"/>
+            <a:endParaRPr lang="ko-KR" altLang="en-US" dirty="0"/>
+          </a:p>
+        </p:txBody>
+      </p:sp>
+      <mc:AlternateContent xmlns:mc="http://schemas.openxmlformats.org/markup-compatibility/2006">
+        <mc:Choice xmlns:a14="http://schemas.microsoft.com/office/drawing/2010/main" Requires="a14">
+          <p:sp>
+            <p:nvSpPr>
+              <p:cNvPr id="35" name="TextBox 34">
+                <a:extLst>
+                  <a:ext uri="{FF2B5EF4-FFF2-40B4-BE49-F238E27FC236}">
+                    <a16:creationId xmlns:a16="http://schemas.microsoft.com/office/drawing/2014/main" id="{7FBBA1FE-DF1A-6901-DAE8-C89D840C56EC}"/>
+                  </a:ext>
+                </a:extLst>
+              </p:cNvPr>
+              <p:cNvSpPr txBox="1"/>
+              <p:nvPr/>
+            </p:nvSpPr>
+            <p:spPr>
+              <a:xfrm>
+                <a:off x="1410881" y="4852118"/>
+                <a:ext cx="494030" cy="311817"/>
+              </a:xfrm>
+              <a:prstGeom prst="rect">
+                <a:avLst/>
+              </a:prstGeom>
+              <a:noFill/>
+            </p:spPr>
+            <p:txBody>
+              <a:bodyPr wrap="square">
+                <a:spAutoFit/>
+              </a:bodyPr>
+              <a:lstStyle/>
+              <a:p>
+                <a:pPr/>
+                <a14:m>
+                  <m:oMathPara xmlns:m="http://schemas.openxmlformats.org/officeDocument/2006/math">
+                    <m:oMathParaPr>
+                      <m:jc m:val="centerGroup"/>
+                    </m:oMathParaPr>
+                    <m:oMath xmlns:m="http://schemas.openxmlformats.org/officeDocument/2006/math">
+                      <m:r>
+                        <a:rPr lang="en-US" altLang="ko-KR" sz="1400" b="0" i="1" smtClean="0">
+                          <a:latin typeface="Cambria Math" panose="02040503050406030204" pitchFamily="18" charset="0"/>
+                        </a:rPr>
+                        <m:t>𝑂</m:t>
+                      </m:r>
+                    </m:oMath>
+                  </m:oMathPara>
+                </a14:m>
+                <a:endParaRPr lang="ko-KR" altLang="en-US" sz="1400" dirty="0"/>
+              </a:p>
+            </p:txBody>
+          </p:sp>
+        </mc:Choice>
+        <mc:Fallback>
+          <p:sp>
+            <p:nvSpPr>
+              <p:cNvPr id="35" name="TextBox 34">
+                <a:extLst>
+                  <a:ext uri="{FF2B5EF4-FFF2-40B4-BE49-F238E27FC236}">
+                    <a16:creationId xmlns:a16="http://schemas.microsoft.com/office/drawing/2014/main" id="{7FBBA1FE-DF1A-6901-DAE8-C89D840C56EC}"/>
+                  </a:ext>
+                </a:extLst>
+              </p:cNvPr>
+              <p:cNvSpPr txBox="1">
+                <a:spLocks noRot="1" noChangeAspect="1" noMove="1" noResize="1" noEditPoints="1" noAdjustHandles="1" noChangeArrowheads="1" noChangeShapeType="1" noTextEdit="1"/>
+              </p:cNvSpPr>
+              <p:nvPr/>
+            </p:nvSpPr>
+            <p:spPr>
+              <a:xfrm>
+                <a:off x="1410881" y="4852118"/>
+                <a:ext cx="494030" cy="311817"/>
+              </a:xfrm>
+              <a:prstGeom prst="rect">
+                <a:avLst/>
+              </a:prstGeom>
+              <a:blipFill>
+                <a:blip r:embed="rId2"/>
+                <a:stretch>
+                  <a:fillRect/>
+                </a:stretch>
+              </a:blipFill>
+            </p:spPr>
+            <p:txBody>
+              <a:bodyPr/>
+              <a:lstStyle/>
+              <a:p>
+                <a:r>
+                  <a:rPr lang="ko-KR" altLang="en-US">
+                    <a:noFill/>
+                  </a:rPr>
+                  <a:t> </a:t>
+                </a:r>
+              </a:p>
+            </p:txBody>
+          </p:sp>
+        </mc:Fallback>
+      </mc:AlternateContent>
+      <p:sp>
+        <p:nvSpPr>
+          <p:cNvPr id="36" name="TextBox 35">
+            <a:extLst>
+              <a:ext uri="{FF2B5EF4-FFF2-40B4-BE49-F238E27FC236}">
+                <a16:creationId xmlns:a16="http://schemas.microsoft.com/office/drawing/2014/main" id="{98F00FF7-FC16-941C-B91A-383F0A4C7A3B}"/>
+              </a:ext>
+            </a:extLst>
+          </p:cNvPr>
+          <p:cNvSpPr txBox="1"/>
+          <p:nvPr/>
+        </p:nvSpPr>
+        <p:spPr>
+          <a:xfrm>
+            <a:off x="5480519" y="4746750"/>
+            <a:ext cx="740397" cy="261610"/>
+          </a:xfrm>
+          <a:prstGeom prst="rect">
+            <a:avLst/>
+          </a:prstGeom>
+          <a:noFill/>
+        </p:spPr>
+        <p:txBody>
+          <a:bodyPr wrap="square">
+            <a:spAutoFit/>
+          </a:bodyPr>
+          <a:lstStyle/>
+          <a:p>
+            <a:pPr algn="ctr"/>
+            <a:r>
+              <a:rPr lang="ko-KR" altLang="en-US" sz="1100"/>
+              <a:t>산출량</a:t>
+            </a:r>
+            <a:endParaRPr lang="ko-KR" altLang="en-US" sz="1100" dirty="0"/>
+          </a:p>
+        </p:txBody>
+      </p:sp>
+      <p:sp>
+        <p:nvSpPr>
+          <p:cNvPr id="38" name="직사각형 37">
+            <a:extLst>
+              <a:ext uri="{FF2B5EF4-FFF2-40B4-BE49-F238E27FC236}">
+                <a16:creationId xmlns:a16="http://schemas.microsoft.com/office/drawing/2014/main" id="{A1E540E7-A669-879F-22F9-878E0FB2E6CE}"/>
+              </a:ext>
+            </a:extLst>
+          </p:cNvPr>
+          <p:cNvSpPr/>
+          <p:nvPr/>
+        </p:nvSpPr>
+        <p:spPr>
+          <a:xfrm rot="16200000">
+            <a:off x="3148423" y="3109581"/>
+            <a:ext cx="4809368" cy="45719"/>
+          </a:xfrm>
+          <a:prstGeom prst="rect">
+            <a:avLst/>
+          </a:prstGeom>
+          <a:solidFill>
+            <a:schemeClr val="bg1"/>
+          </a:solidFill>
+          <a:ln>
+            <a:noFill/>
+          </a:ln>
+        </p:spPr>
+        <p:style>
+          <a:lnRef idx="2">
+            <a:schemeClr val="accent1">
+              <a:shade val="15000"/>
+            </a:schemeClr>
+          </a:lnRef>
+          <a:fillRef idx="1">
+            <a:schemeClr val="accent1"/>
+          </a:fillRef>
+          <a:effectRef idx="0">
+            <a:schemeClr val="accent1"/>
+          </a:effectRef>
+          <a:fontRef idx="minor">
+            <a:schemeClr val="lt1"/>
+          </a:fontRef>
+        </p:style>
+        <p:txBody>
+          <a:bodyPr rtlCol="0" anchor="ctr"/>
+          <a:lstStyle/>
+          <a:p>
+            <a:pPr algn="ctr"/>
+            <a:endParaRPr lang="ko-KR" altLang="en-US"/>
+          </a:p>
+        </p:txBody>
+      </p:sp>
+      <p:sp>
+        <p:nvSpPr>
+          <p:cNvPr id="39" name="TextBox 38">
+            <a:extLst>
+              <a:ext uri="{FF2B5EF4-FFF2-40B4-BE49-F238E27FC236}">
+                <a16:creationId xmlns:a16="http://schemas.microsoft.com/office/drawing/2014/main" id="{DFA3E286-893A-F71D-ED15-933DB92E0730}"/>
+              </a:ext>
+            </a:extLst>
+          </p:cNvPr>
+          <p:cNvSpPr txBox="1"/>
+          <p:nvPr/>
+        </p:nvSpPr>
+        <p:spPr>
+          <a:xfrm>
+            <a:off x="4963059" y="1609204"/>
+            <a:ext cx="385229" cy="311817"/>
+          </a:xfrm>
+          <a:prstGeom prst="rect">
+            <a:avLst/>
+          </a:prstGeom>
+          <a:noFill/>
+        </p:spPr>
+        <p:txBody>
+          <a:bodyPr wrap="square">
+            <a:spAutoFit/>
+          </a:bodyPr>
+          <a:lstStyle/>
+          <a:p>
+            <a:r>
+              <a:rPr lang="en-US" altLang="ko-KR" sz="1400" dirty="0"/>
+              <a:t>TB</a:t>
+            </a:r>
+            <a:endParaRPr lang="ko-KR" altLang="en-US" sz="1400" dirty="0"/>
+          </a:p>
+        </p:txBody>
+      </p:sp>
+      <p:sp>
+        <p:nvSpPr>
+          <p:cNvPr id="40" name="TextBox 39">
+            <a:extLst>
+              <a:ext uri="{FF2B5EF4-FFF2-40B4-BE49-F238E27FC236}">
+                <a16:creationId xmlns:a16="http://schemas.microsoft.com/office/drawing/2014/main" id="{61C9EA01-D036-5E50-B5E1-2DC54725527F}"/>
+              </a:ext>
+            </a:extLst>
+          </p:cNvPr>
+          <p:cNvSpPr txBox="1"/>
+          <p:nvPr/>
+        </p:nvSpPr>
+        <p:spPr>
+          <a:xfrm>
+            <a:off x="4312702" y="1210487"/>
+            <a:ext cx="385229" cy="311817"/>
+          </a:xfrm>
+          <a:prstGeom prst="rect">
+            <a:avLst/>
+          </a:prstGeom>
+          <a:noFill/>
+        </p:spPr>
+        <p:txBody>
+          <a:bodyPr wrap="square">
+            <a:spAutoFit/>
+          </a:bodyPr>
+          <a:lstStyle/>
+          <a:p>
+            <a:r>
+              <a:rPr lang="en-US" altLang="ko-KR" sz="1400" dirty="0"/>
+              <a:t>TC</a:t>
+            </a:r>
+            <a:endParaRPr lang="ko-KR" altLang="en-US" sz="1400" dirty="0"/>
+          </a:p>
+        </p:txBody>
+      </p:sp>
+      <p:cxnSp>
+        <p:nvCxnSpPr>
+          <p:cNvPr id="42" name="직선 연결선 41">
+            <a:extLst>
+              <a:ext uri="{FF2B5EF4-FFF2-40B4-BE49-F238E27FC236}">
+                <a16:creationId xmlns:a16="http://schemas.microsoft.com/office/drawing/2014/main" id="{DC6399D5-26A0-1466-8A3E-2438EAD49FE7}"/>
+              </a:ext>
+            </a:extLst>
+          </p:cNvPr>
+          <p:cNvCxnSpPr>
+            <a:cxnSpLocks/>
+          </p:cNvCxnSpPr>
+          <p:nvPr/>
+        </p:nvCxnSpPr>
+        <p:spPr>
+          <a:xfrm>
+            <a:off x="3131413" y="3677478"/>
+            <a:ext cx="0" cy="1276557"/>
+          </a:xfrm>
+          <a:prstGeom prst="line">
+            <a:avLst/>
+          </a:prstGeom>
+          <a:ln w="6350">
+            <a:solidFill>
+              <a:schemeClr val="tx1"/>
+            </a:solidFill>
+            <a:prstDash val="dash"/>
+          </a:ln>
+        </p:spPr>
+        <p:style>
+          <a:lnRef idx="2">
+            <a:schemeClr val="accent1"/>
+          </a:lnRef>
+          <a:fillRef idx="0">
+            <a:schemeClr val="accent1"/>
+          </a:fillRef>
+          <a:effectRef idx="1">
+            <a:schemeClr val="accent1"/>
+          </a:effectRef>
+          <a:fontRef idx="minor">
+            <a:schemeClr val="tx1"/>
+          </a:fontRef>
+        </p:style>
+      </p:cxnSp>
+      <p:cxnSp>
+        <p:nvCxnSpPr>
+          <p:cNvPr id="43" name="직선 연결선 42">
+            <a:extLst>
+              <a:ext uri="{FF2B5EF4-FFF2-40B4-BE49-F238E27FC236}">
+                <a16:creationId xmlns:a16="http://schemas.microsoft.com/office/drawing/2014/main" id="{5AF3E77D-9EC8-D310-339E-4889ADF7031E}"/>
+              </a:ext>
+            </a:extLst>
+          </p:cNvPr>
+          <p:cNvCxnSpPr>
+            <a:cxnSpLocks/>
+          </p:cNvCxnSpPr>
+          <p:nvPr/>
+        </p:nvCxnSpPr>
+        <p:spPr>
+          <a:xfrm flipH="1">
+            <a:off x="1748128" y="2562798"/>
+            <a:ext cx="2277772" cy="1598252"/>
+          </a:xfrm>
+          <a:prstGeom prst="line">
+            <a:avLst/>
+          </a:prstGeom>
+          <a:ln w="9525">
+            <a:solidFill>
+              <a:schemeClr val="tx1"/>
+            </a:solidFill>
+            <a:prstDash val="solid"/>
+          </a:ln>
+        </p:spPr>
+        <p:style>
+          <a:lnRef idx="2">
+            <a:schemeClr val="accent1"/>
+          </a:lnRef>
+          <a:fillRef idx="0">
+            <a:schemeClr val="accent1"/>
+          </a:fillRef>
+          <a:effectRef idx="1">
+            <a:schemeClr val="accent1"/>
+          </a:effectRef>
+          <a:fontRef idx="minor">
+            <a:schemeClr val="tx1"/>
+          </a:fontRef>
+        </p:style>
+      </p:cxnSp>
+      <p:cxnSp>
+        <p:nvCxnSpPr>
+          <p:cNvPr id="44" name="직선 연결선 43">
+            <a:extLst>
+              <a:ext uri="{FF2B5EF4-FFF2-40B4-BE49-F238E27FC236}">
+                <a16:creationId xmlns:a16="http://schemas.microsoft.com/office/drawing/2014/main" id="{8A0507A0-714E-0B74-F7D5-E957BEDF3D61}"/>
+              </a:ext>
+            </a:extLst>
+          </p:cNvPr>
+          <p:cNvCxnSpPr>
+            <a:cxnSpLocks/>
+          </p:cNvCxnSpPr>
+          <p:nvPr/>
+        </p:nvCxnSpPr>
+        <p:spPr>
+          <a:xfrm>
+            <a:off x="3422020" y="3863819"/>
+            <a:ext cx="0" cy="1908000"/>
+          </a:xfrm>
+          <a:prstGeom prst="line">
+            <a:avLst/>
+          </a:prstGeom>
+          <a:ln w="6350">
+            <a:solidFill>
+              <a:schemeClr val="tx1"/>
+            </a:solidFill>
+            <a:prstDash val="dash"/>
+          </a:ln>
+        </p:spPr>
+        <p:style>
+          <a:lnRef idx="2">
+            <a:schemeClr val="accent1"/>
+          </a:lnRef>
+          <a:fillRef idx="0">
+            <a:schemeClr val="accent1"/>
+          </a:fillRef>
+          <a:effectRef idx="1">
+            <a:schemeClr val="accent1"/>
+          </a:effectRef>
+          <a:fontRef idx="minor">
+            <a:schemeClr val="tx1"/>
+          </a:fontRef>
+        </p:style>
+      </p:cxnSp>
+      <mc:AlternateContent xmlns:mc="http://schemas.openxmlformats.org/markup-compatibility/2006">
+        <mc:Choice xmlns:a14="http://schemas.microsoft.com/office/drawing/2010/main" Requires="a14">
+          <p:sp>
+            <p:nvSpPr>
+              <p:cNvPr id="45" name="TextBox 44">
+                <a:extLst>
+                  <a:ext uri="{FF2B5EF4-FFF2-40B4-BE49-F238E27FC236}">
+                    <a16:creationId xmlns:a16="http://schemas.microsoft.com/office/drawing/2014/main" id="{E9C7AB2E-FFD7-0110-8793-0622F9DDE84F}"/>
+                  </a:ext>
+                </a:extLst>
+              </p:cNvPr>
+              <p:cNvSpPr txBox="1"/>
+              <p:nvPr/>
+            </p:nvSpPr>
+            <p:spPr>
+              <a:xfrm>
+                <a:off x="4245486" y="4905244"/>
+                <a:ext cx="494030" cy="311817"/>
+              </a:xfrm>
+              <a:prstGeom prst="rect">
+                <a:avLst/>
+              </a:prstGeom>
+              <a:noFill/>
+            </p:spPr>
+            <p:txBody>
+              <a:bodyPr wrap="square">
+                <a:spAutoFit/>
+              </a:bodyPr>
+              <a:lstStyle/>
+              <a:p>
+                <a:pPr/>
+                <a14:m>
+                  <m:oMathPara xmlns:m="http://schemas.openxmlformats.org/officeDocument/2006/math">
+                    <m:oMathParaPr>
+                      <m:jc m:val="centerGroup"/>
+                    </m:oMathParaPr>
+                    <m:oMath xmlns:m="http://schemas.openxmlformats.org/officeDocument/2006/math">
+                      <m:sSub>
+                        <m:sSubPr>
+                          <m:ctrlPr>
+                            <a:rPr lang="en-US" altLang="ko-KR" sz="1400" b="0" i="1" smtClean="0">
+                              <a:latin typeface="Cambria Math" panose="02040503050406030204" pitchFamily="18" charset="0"/>
+                            </a:rPr>
+                          </m:ctrlPr>
+                        </m:sSubPr>
+                        <m:e>
+                          <m:r>
+                            <a:rPr lang="en-US" altLang="ko-KR" sz="1400" b="0" i="1" smtClean="0">
+                              <a:latin typeface="Cambria Math" panose="02040503050406030204" pitchFamily="18" charset="0"/>
+                            </a:rPr>
+                            <m:t>𝑄</m:t>
+                          </m:r>
+                        </m:e>
+                        <m:sub>
+                          <m:r>
+                            <a:rPr lang="en-US" altLang="ko-KR" sz="1400" b="0" i="1" smtClean="0">
+                              <a:latin typeface="Cambria Math" panose="02040503050406030204" pitchFamily="18" charset="0"/>
+                            </a:rPr>
+                            <m:t>𝑁</m:t>
+                          </m:r>
+                        </m:sub>
+                      </m:sSub>
+                    </m:oMath>
+                  </m:oMathPara>
+                </a14:m>
+                <a:endParaRPr lang="ko-KR" altLang="en-US" sz="1400" dirty="0"/>
+              </a:p>
+            </p:txBody>
+          </p:sp>
+        </mc:Choice>
+        <mc:Fallback>
+          <p:sp>
+            <p:nvSpPr>
+              <p:cNvPr id="45" name="TextBox 44">
+                <a:extLst>
+                  <a:ext uri="{FF2B5EF4-FFF2-40B4-BE49-F238E27FC236}">
+                    <a16:creationId xmlns:a16="http://schemas.microsoft.com/office/drawing/2014/main" id="{E9C7AB2E-FFD7-0110-8793-0622F9DDE84F}"/>
+                  </a:ext>
+                </a:extLst>
+              </p:cNvPr>
+              <p:cNvSpPr txBox="1">
+                <a:spLocks noRot="1" noChangeAspect="1" noMove="1" noResize="1" noEditPoints="1" noAdjustHandles="1" noChangeArrowheads="1" noChangeShapeType="1" noTextEdit="1"/>
+              </p:cNvSpPr>
+              <p:nvPr/>
+            </p:nvSpPr>
+            <p:spPr>
+              <a:xfrm>
+                <a:off x="4245486" y="4905244"/>
+                <a:ext cx="494030" cy="311817"/>
+              </a:xfrm>
+              <a:prstGeom prst="rect">
+                <a:avLst/>
+              </a:prstGeom>
+              <a:blipFill>
+                <a:blip r:embed="rId3"/>
+                <a:stretch>
+                  <a:fillRect b="-7843"/>
+                </a:stretch>
+              </a:blipFill>
+            </p:spPr>
+            <p:txBody>
+              <a:bodyPr/>
+              <a:lstStyle/>
+              <a:p>
+                <a:r>
+                  <a:rPr lang="ko-KR" altLang="en-US">
+                    <a:noFill/>
+                  </a:rPr>
+                  <a:t> </a:t>
+                </a:r>
+              </a:p>
+            </p:txBody>
+          </p:sp>
+        </mc:Fallback>
+      </mc:AlternateContent>
+      <mc:AlternateContent xmlns:mc="http://schemas.openxmlformats.org/markup-compatibility/2006">
+        <mc:Choice xmlns:a14="http://schemas.microsoft.com/office/drawing/2010/main" Requires="a14">
+          <p:sp>
+            <p:nvSpPr>
+              <p:cNvPr id="46" name="TextBox 45">
+                <a:extLst>
+                  <a:ext uri="{FF2B5EF4-FFF2-40B4-BE49-F238E27FC236}">
+                    <a16:creationId xmlns:a16="http://schemas.microsoft.com/office/drawing/2014/main" id="{3A064862-4A3C-E9F4-4A19-07B4907BA98B}"/>
+                  </a:ext>
+                </a:extLst>
+              </p:cNvPr>
+              <p:cNvSpPr txBox="1"/>
+              <p:nvPr/>
+            </p:nvSpPr>
+            <p:spPr>
+              <a:xfrm>
+                <a:off x="2929885" y="4905244"/>
+                <a:ext cx="494030" cy="307777"/>
+              </a:xfrm>
+              <a:prstGeom prst="rect">
+                <a:avLst/>
+              </a:prstGeom>
+              <a:noFill/>
+            </p:spPr>
+            <p:txBody>
+              <a:bodyPr wrap="square">
+                <a:spAutoFit/>
+              </a:bodyPr>
+              <a:lstStyle/>
+              <a:p>
+                <a:pPr/>
+                <a14:m>
+                  <m:oMathPara xmlns:m="http://schemas.openxmlformats.org/officeDocument/2006/math">
+                    <m:oMathParaPr>
+                      <m:jc m:val="centerGroup"/>
+                    </m:oMathParaPr>
+                    <m:oMath xmlns:m="http://schemas.openxmlformats.org/officeDocument/2006/math">
+                      <m:sSup>
+                        <m:sSupPr>
+                          <m:ctrlPr>
+                            <a:rPr lang="en-US" altLang="ko-KR" sz="1400" i="1" smtClean="0">
+                              <a:latin typeface="Cambria Math" panose="02040503050406030204" pitchFamily="18" charset="0"/>
+                            </a:rPr>
+                          </m:ctrlPr>
+                        </m:sSupPr>
+                        <m:e>
+                          <m:r>
+                            <a:rPr lang="en-US" altLang="ko-KR" sz="1400" b="0" i="1" smtClean="0">
+                              <a:latin typeface="Cambria Math" panose="02040503050406030204" pitchFamily="18" charset="0"/>
+                            </a:rPr>
+                            <m:t>𝑄</m:t>
+                          </m:r>
+                        </m:e>
+                        <m:sup>
+                          <m:r>
+                            <a:rPr lang="en-US" altLang="ko-KR" sz="1400" b="0" i="1" smtClean="0">
+                              <a:latin typeface="Cambria Math" panose="02040503050406030204" pitchFamily="18" charset="0"/>
+                            </a:rPr>
+                            <m:t>∗</m:t>
+                          </m:r>
+                        </m:sup>
+                      </m:sSup>
+                    </m:oMath>
+                  </m:oMathPara>
+                </a14:m>
+                <a:endParaRPr lang="ko-KR" altLang="en-US" sz="1400" dirty="0"/>
+              </a:p>
+            </p:txBody>
+          </p:sp>
+        </mc:Choice>
+        <mc:Fallback>
+          <p:sp>
+            <p:nvSpPr>
+              <p:cNvPr id="46" name="TextBox 45">
+                <a:extLst>
+                  <a:ext uri="{FF2B5EF4-FFF2-40B4-BE49-F238E27FC236}">
+                    <a16:creationId xmlns:a16="http://schemas.microsoft.com/office/drawing/2014/main" id="{3A064862-4A3C-E9F4-4A19-07B4907BA98B}"/>
+                  </a:ext>
+                </a:extLst>
+              </p:cNvPr>
+              <p:cNvSpPr txBox="1">
+                <a:spLocks noRot="1" noChangeAspect="1" noMove="1" noResize="1" noEditPoints="1" noAdjustHandles="1" noChangeArrowheads="1" noChangeShapeType="1" noTextEdit="1"/>
+              </p:cNvSpPr>
+              <p:nvPr/>
+            </p:nvSpPr>
+            <p:spPr>
+              <a:xfrm>
+                <a:off x="2929885" y="4905244"/>
+                <a:ext cx="494030" cy="307777"/>
+              </a:xfrm>
+              <a:prstGeom prst="rect">
+                <a:avLst/>
+              </a:prstGeom>
+              <a:blipFill>
+                <a:blip r:embed="rId4"/>
+                <a:stretch>
+                  <a:fillRect b="-10000"/>
+                </a:stretch>
+              </a:blipFill>
+            </p:spPr>
+            <p:txBody>
+              <a:bodyPr/>
+              <a:lstStyle/>
+              <a:p>
+                <a:r>
+                  <a:rPr lang="ko-KR" altLang="en-US">
+                    <a:noFill/>
+                  </a:rPr>
+                  <a:t> </a:t>
+                </a:r>
+              </a:p>
+            </p:txBody>
+          </p:sp>
+        </mc:Fallback>
+      </mc:AlternateContent>
+      <p:sp>
+        <p:nvSpPr>
+          <p:cNvPr id="47" name="직사각형 46">
+            <a:extLst>
+              <a:ext uri="{FF2B5EF4-FFF2-40B4-BE49-F238E27FC236}">
+                <a16:creationId xmlns:a16="http://schemas.microsoft.com/office/drawing/2014/main" id="{41ECB3C3-3408-FD0B-82AC-91AFD47D76D2}"/>
+              </a:ext>
+            </a:extLst>
+          </p:cNvPr>
+          <p:cNvSpPr/>
+          <p:nvPr/>
+        </p:nvSpPr>
+        <p:spPr>
+          <a:xfrm rot="10800000">
+            <a:off x="1752299" y="523575"/>
+            <a:ext cx="4809368" cy="1754114"/>
+          </a:xfrm>
+          <a:prstGeom prst="rect">
+            <a:avLst/>
+          </a:prstGeom>
+          <a:solidFill>
+            <a:schemeClr val="bg1"/>
+          </a:solidFill>
+          <a:ln>
+            <a:noFill/>
+          </a:ln>
+        </p:spPr>
+        <p:style>
+          <a:lnRef idx="2">
+            <a:schemeClr val="accent1">
+              <a:shade val="15000"/>
+            </a:schemeClr>
+          </a:lnRef>
+          <a:fillRef idx="1">
+            <a:schemeClr val="accent1"/>
+          </a:fillRef>
+          <a:effectRef idx="0">
+            <a:schemeClr val="accent1"/>
+          </a:effectRef>
+          <a:fontRef idx="minor">
+            <a:schemeClr val="lt1"/>
+          </a:fontRef>
+        </p:style>
+        <p:txBody>
+          <a:bodyPr rtlCol="0" anchor="ctr"/>
+          <a:lstStyle/>
+          <a:p>
+            <a:pPr algn="ctr"/>
+            <a:endParaRPr lang="ko-KR" altLang="en-US"/>
+          </a:p>
+        </p:txBody>
+      </p:sp>
+      <p:sp>
+        <p:nvSpPr>
+          <p:cNvPr id="37" name="TextBox 36">
+            <a:extLst>
+              <a:ext uri="{FF2B5EF4-FFF2-40B4-BE49-F238E27FC236}">
+                <a16:creationId xmlns:a16="http://schemas.microsoft.com/office/drawing/2014/main" id="{FB8A28D2-97A1-AFD5-81C2-34D52F9308D7}"/>
+              </a:ext>
+            </a:extLst>
+          </p:cNvPr>
+          <p:cNvSpPr txBox="1"/>
+          <p:nvPr/>
+        </p:nvSpPr>
+        <p:spPr>
+          <a:xfrm>
+            <a:off x="1236271" y="1969937"/>
+            <a:ext cx="905814" cy="261610"/>
+          </a:xfrm>
+          <a:prstGeom prst="rect">
+            <a:avLst/>
+          </a:prstGeom>
+          <a:noFill/>
+        </p:spPr>
+        <p:txBody>
+          <a:bodyPr wrap="square">
+            <a:spAutoFit/>
+          </a:bodyPr>
+          <a:lstStyle/>
+          <a:p>
+            <a:r>
+              <a:rPr lang="ko-KR" altLang="en-US" sz="1100"/>
+              <a:t>가격</a:t>
+            </a:r>
+            <a:r>
+              <a:rPr lang="en-US" altLang="ko-KR" sz="1100" dirty="0"/>
+              <a:t>, </a:t>
+            </a:r>
+            <a:r>
+              <a:rPr lang="ko-KR" altLang="en-US" sz="1100" dirty="0"/>
+              <a:t>비용</a:t>
+            </a:r>
+          </a:p>
+        </p:txBody>
+      </p:sp>
+      <p:cxnSp>
+        <p:nvCxnSpPr>
+          <p:cNvPr id="41" name="직선 연결선 40">
+            <a:extLst>
+              <a:ext uri="{FF2B5EF4-FFF2-40B4-BE49-F238E27FC236}">
+                <a16:creationId xmlns:a16="http://schemas.microsoft.com/office/drawing/2014/main" id="{6CD3C915-1D20-19AA-C560-CD718EFEF19F}"/>
+              </a:ext>
+            </a:extLst>
+          </p:cNvPr>
+          <p:cNvCxnSpPr>
+            <a:cxnSpLocks/>
+          </p:cNvCxnSpPr>
+          <p:nvPr/>
+        </p:nvCxnSpPr>
+        <p:spPr>
+          <a:xfrm flipH="1" flipV="1">
+            <a:off x="1752299" y="2562798"/>
+            <a:ext cx="3069925" cy="1901252"/>
+          </a:xfrm>
+          <a:prstGeom prst="line">
+            <a:avLst/>
+          </a:prstGeom>
+          <a:ln w="9525">
+            <a:solidFill>
+              <a:schemeClr val="tx1"/>
+            </a:solidFill>
+            <a:prstDash val="solid"/>
+          </a:ln>
+        </p:spPr>
+        <p:style>
+          <a:lnRef idx="2">
+            <a:schemeClr val="accent1"/>
+          </a:lnRef>
+          <a:fillRef idx="0">
+            <a:schemeClr val="accent1"/>
+          </a:fillRef>
+          <a:effectRef idx="1">
+            <a:schemeClr val="accent1"/>
+          </a:effectRef>
+          <a:fontRef idx="minor">
+            <a:schemeClr val="tx1"/>
+          </a:fontRef>
+        </p:style>
+      </p:cxnSp>
+      <p:cxnSp>
+        <p:nvCxnSpPr>
+          <p:cNvPr id="54" name="직선 연결선 53">
+            <a:extLst>
+              <a:ext uri="{FF2B5EF4-FFF2-40B4-BE49-F238E27FC236}">
+                <a16:creationId xmlns:a16="http://schemas.microsoft.com/office/drawing/2014/main" id="{C4FC169B-C40F-0D57-2A18-6BCA99F77872}"/>
+              </a:ext>
+            </a:extLst>
+          </p:cNvPr>
+          <p:cNvCxnSpPr>
+            <a:cxnSpLocks/>
+          </p:cNvCxnSpPr>
+          <p:nvPr/>
+        </p:nvCxnSpPr>
+        <p:spPr>
+          <a:xfrm flipH="1">
+            <a:off x="1748128" y="2905125"/>
+            <a:ext cx="2600035" cy="1252933"/>
+          </a:xfrm>
+          <a:prstGeom prst="line">
+            <a:avLst/>
+          </a:prstGeom>
+          <a:ln w="9525">
+            <a:solidFill>
+              <a:schemeClr val="tx1"/>
+            </a:solidFill>
+            <a:prstDash val="solid"/>
+          </a:ln>
+        </p:spPr>
+        <p:style>
+          <a:lnRef idx="2">
+            <a:schemeClr val="accent1"/>
+          </a:lnRef>
+          <a:fillRef idx="0">
+            <a:schemeClr val="accent1"/>
+          </a:fillRef>
+          <a:effectRef idx="1">
+            <a:schemeClr val="accent1"/>
+          </a:effectRef>
+          <a:fontRef idx="minor">
+            <a:schemeClr val="tx1"/>
+          </a:fontRef>
+        </p:style>
+      </p:cxnSp>
+      <p:cxnSp>
+        <p:nvCxnSpPr>
+          <p:cNvPr id="57" name="직선 연결선 56">
+            <a:extLst>
+              <a:ext uri="{FF2B5EF4-FFF2-40B4-BE49-F238E27FC236}">
+                <a16:creationId xmlns:a16="http://schemas.microsoft.com/office/drawing/2014/main" id="{765A4FFE-6F26-110D-5DF5-58F22A4B58CC}"/>
+              </a:ext>
+            </a:extLst>
+          </p:cNvPr>
+          <p:cNvCxnSpPr>
+            <a:cxnSpLocks/>
+          </p:cNvCxnSpPr>
+          <p:nvPr/>
+        </p:nvCxnSpPr>
+        <p:spPr>
+          <a:xfrm flipH="1">
+            <a:off x="1748128" y="3531591"/>
+            <a:ext cx="2600035" cy="1252933"/>
+          </a:xfrm>
+          <a:prstGeom prst="line">
+            <a:avLst/>
+          </a:prstGeom>
+          <a:ln w="9525">
+            <a:solidFill>
+              <a:schemeClr val="tx1"/>
+            </a:solidFill>
+            <a:prstDash val="solid"/>
+          </a:ln>
+        </p:spPr>
+        <p:style>
+          <a:lnRef idx="2">
+            <a:schemeClr val="accent1"/>
+          </a:lnRef>
+          <a:fillRef idx="0">
+            <a:schemeClr val="accent1"/>
+          </a:fillRef>
+          <a:effectRef idx="1">
+            <a:schemeClr val="accent1"/>
+          </a:effectRef>
+          <a:fontRef idx="minor">
+            <a:schemeClr val="tx1"/>
+          </a:fontRef>
+        </p:style>
+      </p:cxnSp>
+    </p:spTree>
+    <p:extLst>
+      <p:ext uri="{BB962C8B-B14F-4D97-AF65-F5344CB8AC3E}">
+        <p14:creationId xmlns:p14="http://schemas.microsoft.com/office/powerpoint/2010/main" val="160539317"/>
       </p:ext>
     </p:extLst>
   </p:cSld>
